--- a/docs/pptx/Ch5_P3_Formal_Spec_Stack.pptx
+++ b/docs/pptx/Ch5_P3_Formal_Spec_Stack.pptx
@@ -11,9 +11,12 @@
     <p:sldId id="259" r:id="rId5"/>
     <p:sldId id="260" r:id="rId6"/>
     <p:sldId id="261" r:id="rId7"/>
+    <p:sldId id="262" r:id="rId8"/>
+    <p:sldId id="263" r:id="rId9"/>
+    <p:sldId id="264" r:id="rId10"/>
   </p:sldIdLst>
   <p:notesMasterIdLst>
-    <p:notesMasterId r:id="rId8"/>
+    <p:notesMasterId r:id="rId11"/>
   </p:notesMasterIdLst>
   <p:sldSz cx="9144000" cy="5143500"/>
   <p:notesSz cx="5143500" cy="9144000"/>
@@ -507,7 +510,11 @@
           <a:p>
             <a:r>
               <a:rPr lang="en-US" dirty="0"/>
-              <a:t/>
+              <a:t>TITRE: Spécification Formelle
+d'un ADT Stack
+Critère: Critère P3 — Notation impérative, VDM, SDL, ASN.1
+Objectif de cette présentation : couvrir les concepts clés pour le critère Critère P3 — Notation impérative, VDM, SDL, ASN.1.
+Durée estimée : 1h30 à 2h avec exercices.</a:t>
             </a:r>
             <a:endParaRPr lang="en-US" dirty="0"/>
           </a:p>
@@ -595,7 +602,9 @@
           <a:p>
             <a:r>
               <a:rPr lang="en-US" dirty="0"/>
-              <a:t/>
+              <a:t>PROF: Commencer par demander aux étudiants ce qu'est un ADT. Rappeler que la notation impérative est un CONTRAT.
+Poser la question : 'Si je vous donne un Stack, quelles opérations attendez-vous ?'
+Faire écrire au tableau les opérations avant de montrer la slide suivante.</a:t>
             </a:r>
             <a:endParaRPr lang="en-US" dirty="0"/>
           </a:p>
@@ -683,7 +692,13 @@
           <a:p>
             <a:r>
               <a:rPr lang="en-US" dirty="0"/>
-              <a:t/>
+              <a:t>PROF: Écrire la spec complète au tableau avec les étudiants.
+Insister sur :
+- PRE = ce qui DOIT être vrai AVANT l'appel
+- POST = ce qui est GARANTI APRÈS l'appel
+- INVARIANT = TOUJOURS vrai
+- AXIOME = propriété mathématique fondamentale
+Exercice : demander aux étudiants d'écrire la PRE de pop() et peek().</a:t>
             </a:r>
             <a:endParaRPr lang="en-US" dirty="0"/>
           </a:p>
@@ -771,7 +786,9 @@
           <a:p>
             <a:r>
               <a:rPr lang="en-US" dirty="0"/>
-              <a:t/>
+              <a:t>PROF: Expliquer pourquoi on n'écrit pas directement du Java.
+Analogie : un architecte dessine des plans AVANT de construire. La spec formelle = les plans du logiciel.
+Question aux étudiants : 'Que se passe-t-il si on code sans spécifier d'abord ?'</a:t>
             </a:r>
             <a:endParaRPr lang="en-US" dirty="0"/>
           </a:p>
@@ -859,7 +876,10 @@
           <a:p>
             <a:r>
               <a:rPr lang="en-US" dirty="0"/>
-              <a:t/>
+              <a:t>PROF: VDM vient de Vienne (IBM lab, années 1970).
+hd = head (premier élément), tl = tail (reste de la liste)
+Faire un parallèle avec la notation impérative vue avant.
+Exercice : écrire en VDM l'invariant d'une Queue (len(q) &gt;= 0 et front est le premier élément).</a:t>
             </a:r>
             <a:endParaRPr lang="en-US" dirty="0"/>
           </a:p>
@@ -947,7 +967,11 @@
           <a:p>
             <a:r>
               <a:rPr lang="en-US" dirty="0"/>
-              <a:t/>
+              <a:t>PROF: SDL est visuel — montrer un diagramme simple.
+Exemple : un distributeur de boissons
+- État 'Attente' → reçoit signal 'Pièce' → État 'Prêt'
+- État 'Prêt' → reçoit signal 'Choix' → État 'Distribution'
+Faire dessiner aux étudiants un automate SDL pour un Stack (états: Vide, NonVide).</a:t>
             </a:r>
             <a:endParaRPr lang="en-US" dirty="0"/>
           </a:p>
@@ -971,6 +995,285 @@
             <a:fld id="{F7021451-1387-4CA6-816F-3879F97B5CBC}" type="slidenum">
               <a:rPr lang="en-US"/>
               <a:t>6</a:t>
+            </a:fld>
+            <a:endParaRPr lang="en-US"/>
+          </a:p>
+        </p:txBody>
+      </p:sp>
+    </p:spTree>
+    <p:extLst>
+      <p:ext uri="{BB962C8B-B14F-4D97-AF65-F5344CB8AC3E}">
+        <p14:creationId xmlns:p14="http://schemas.microsoft.com/office/powerpoint/2010/main" val="1024086991"/>
+      </p:ext>
+    </p:extLst>
+  </p:cSld>
+  <p:clrMapOvr>
+    <a:masterClrMapping/>
+  </p:clrMapOvr>
+</p:notes>
+</file>
+
+<file path=ppt/notesSlides/notesSlide7.xml><?xml version="1.0" encoding="utf-8"?>
+<p:notes xmlns:a="http://schemas.openxmlformats.org/drawingml/2006/main" xmlns:r="http://schemas.openxmlformats.org/officeDocument/2006/relationships" xmlns:p="http://schemas.openxmlformats.org/presentationml/2006/main">
+  <p:cSld>
+    <p:spTree>
+      <p:nvGrpSpPr>
+        <p:cNvPr id="1" name=""/>
+        <p:cNvGrpSpPr/>
+        <p:nvPr/>
+      </p:nvGrpSpPr>
+      <p:grpSpPr>
+        <a:xfrm>
+          <a:off x="0" y="0"/>
+          <a:ext cx="0" cy="0"/>
+          <a:chOff x="0" y="0"/>
+          <a:chExt cx="0" cy="0"/>
+        </a:xfrm>
+      </p:grpSpPr>
+      <p:sp>
+        <p:nvSpPr>
+          <p:cNvPr id="2" name="Slide Image Placeholder 1"/>
+          <p:cNvSpPr>
+            <a:spLocks noGrp="1" noRot="1" noChangeAspect="1"/>
+          </p:cNvSpPr>
+          <p:nvPr>
+            <p:ph type="sldImg"/>
+          </p:nvPr>
+        </p:nvSpPr>
+        <p:spPr/>
+      </p:sp>
+      <p:sp>
+        <p:nvSpPr>
+          <p:cNvPr id="3" name="Notes Placeholder 2"/>
+          <p:cNvSpPr>
+            <a:spLocks noGrp="1"/>
+          </p:cNvSpPr>
+          <p:nvPr>
+            <p:ph type="body" idx="1"/>
+          </p:nvPr>
+        </p:nvSpPr>
+        <p:spPr/>
+        <p:txBody>
+          <a:bodyPr/>
+          <a:lstStyle/>
+          <a:p>
+            <a:r>
+              <a:rPr lang="en-US" dirty="0"/>
+              <a:t>PROF: ASN.1 est utilisé partout sans qu'on le sache : HTTPS, cartes SIM, GPS.
+Exemple concret :
+Student ::= SEQUENCE {
+  name     UTF8String,
+  age      INTEGER,
+  enrolled BOOLEAN
+}
+Faire écrire aux étudiants une structure ASN.1 pour un Produit (nom, prix, stock).</a:t>
+            </a:r>
+            <a:endParaRPr lang="en-US" dirty="0"/>
+          </a:p>
+        </p:txBody>
+      </p:sp>
+      <p:sp>
+        <p:nvSpPr>
+          <p:cNvPr id="4" name="Slide Number Placeholder 3"/>
+          <p:cNvSpPr>
+            <a:spLocks noGrp="1"/>
+          </p:cNvSpPr>
+          <p:nvPr>
+            <p:ph type="sldNum" sz="quarter" idx="10"/>
+          </p:nvPr>
+        </p:nvSpPr>
+        <p:spPr/>
+        <p:txBody>
+          <a:bodyPr/>
+          <a:lstStyle/>
+          <a:p>
+            <a:fld id="{F7021451-1387-4CA6-816F-3879F97B5CBC}" type="slidenum">
+              <a:rPr lang="en-US"/>
+              <a:t>7</a:t>
+            </a:fld>
+            <a:endParaRPr lang="en-US"/>
+          </a:p>
+        </p:txBody>
+      </p:sp>
+    </p:spTree>
+    <p:extLst>
+      <p:ext uri="{BB962C8B-B14F-4D97-AF65-F5344CB8AC3E}">
+        <p14:creationId xmlns:p14="http://schemas.microsoft.com/office/powerpoint/2010/main" val="1024086991"/>
+      </p:ext>
+    </p:extLst>
+  </p:cSld>
+  <p:clrMapOvr>
+    <a:masterClrMapping/>
+  </p:clrMapOvr>
+</p:notes>
+</file>
+
+<file path=ppt/notesSlides/notesSlide8.xml><?xml version="1.0" encoding="utf-8"?>
+<p:notes xmlns:a="http://schemas.openxmlformats.org/drawingml/2006/main" xmlns:r="http://schemas.openxmlformats.org/officeDocument/2006/relationships" xmlns:p="http://schemas.openxmlformats.org/presentationml/2006/main">
+  <p:cSld>
+    <p:spTree>
+      <p:nvGrpSpPr>
+        <p:cNvPr id="1" name=""/>
+        <p:cNvGrpSpPr/>
+        <p:nvPr/>
+      </p:nvGrpSpPr>
+      <p:grpSpPr>
+        <a:xfrm>
+          <a:off x="0" y="0"/>
+          <a:ext cx="0" cy="0"/>
+          <a:chOff x="0" y="0"/>
+          <a:chExt cx="0" cy="0"/>
+        </a:xfrm>
+      </p:grpSpPr>
+      <p:sp>
+        <p:nvSpPr>
+          <p:cNvPr id="2" name="Slide Image Placeholder 1"/>
+          <p:cNvSpPr>
+            <a:spLocks noGrp="1" noRot="1" noChangeAspect="1"/>
+          </p:cNvSpPr>
+          <p:nvPr>
+            <p:ph type="sldImg"/>
+          </p:nvPr>
+        </p:nvSpPr>
+        <p:spPr/>
+      </p:sp>
+      <p:sp>
+        <p:nvSpPr>
+          <p:cNvPr id="3" name="Notes Placeholder 2"/>
+          <p:cNvSpPr>
+            <a:spLocks noGrp="1"/>
+          </p:cNvSpPr>
+          <p:nvPr>
+            <p:ph type="body" idx="1"/>
+          </p:nvPr>
+        </p:nvSpPr>
+        <p:spPr/>
+        <p:txBody>
+          <a:bodyPr/>
+          <a:lstStyle/>
+          <a:p>
+            <a:r>
+              <a:rPr lang="en-US" dirty="0"/>
+              <a:t>PROF: C'est LE slide le plus important du chapitre.
+Exercice en classe : donner des énoncés et demander aux étudiants de classifier :
+- 'solde &gt;= 0 toujours' → INVARIANT
+- 'montant &gt; 0 avant retrait' → PRE
+- 'solde = ancien_solde - montant après retrait' → POST
+- 'retirer(déposer(compte, x)) restitue x' → AXIOME
+Faire passer les étudiants au tableau.</a:t>
+            </a:r>
+            <a:endParaRPr lang="en-US" dirty="0"/>
+          </a:p>
+        </p:txBody>
+      </p:sp>
+      <p:sp>
+        <p:nvSpPr>
+          <p:cNvPr id="4" name="Slide Number Placeholder 3"/>
+          <p:cNvSpPr>
+            <a:spLocks noGrp="1"/>
+          </p:cNvSpPr>
+          <p:nvPr>
+            <p:ph type="sldNum" sz="quarter" idx="10"/>
+          </p:nvPr>
+        </p:nvSpPr>
+        <p:spPr/>
+        <p:txBody>
+          <a:bodyPr/>
+          <a:lstStyle/>
+          <a:p>
+            <a:fld id="{F7021451-1387-4CA6-816F-3879F97B5CBC}" type="slidenum">
+              <a:rPr lang="en-US"/>
+              <a:t>8</a:t>
+            </a:fld>
+            <a:endParaRPr lang="en-US"/>
+          </a:p>
+        </p:txBody>
+      </p:sp>
+    </p:spTree>
+    <p:extLst>
+      <p:ext uri="{BB962C8B-B14F-4D97-AF65-F5344CB8AC3E}">
+        <p14:creationId xmlns:p14="http://schemas.microsoft.com/office/powerpoint/2010/main" val="1024086991"/>
+      </p:ext>
+    </p:extLst>
+  </p:cSld>
+  <p:clrMapOvr>
+    <a:masterClrMapping/>
+  </p:clrMapOvr>
+</p:notes>
+</file>
+
+<file path=ppt/notesSlides/notesSlide9.xml><?xml version="1.0" encoding="utf-8"?>
+<p:notes xmlns:a="http://schemas.openxmlformats.org/drawingml/2006/main" xmlns:r="http://schemas.openxmlformats.org/officeDocument/2006/relationships" xmlns:p="http://schemas.openxmlformats.org/presentationml/2006/main">
+  <p:cSld>
+    <p:spTree>
+      <p:nvGrpSpPr>
+        <p:cNvPr id="1" name=""/>
+        <p:cNvGrpSpPr/>
+        <p:nvPr/>
+      </p:nvGrpSpPr>
+      <p:grpSpPr>
+        <a:xfrm>
+          <a:off x="0" y="0"/>
+          <a:ext cx="0" cy="0"/>
+          <a:chOff x="0" y="0"/>
+          <a:chExt cx="0" cy="0"/>
+        </a:xfrm>
+      </p:grpSpPr>
+      <p:sp>
+        <p:nvSpPr>
+          <p:cNvPr id="2" name="Slide Image Placeholder 1"/>
+          <p:cNvSpPr>
+            <a:spLocks noGrp="1" noRot="1" noChangeAspect="1"/>
+          </p:cNvSpPr>
+          <p:nvPr>
+            <p:ph type="sldImg"/>
+          </p:nvPr>
+        </p:nvSpPr>
+        <p:spPr/>
+      </p:sp>
+      <p:sp>
+        <p:nvSpPr>
+          <p:cNvPr id="3" name="Notes Placeholder 2"/>
+          <p:cNvSpPr>
+            <a:spLocks noGrp="1"/>
+          </p:cNvSpPr>
+          <p:nvPr>
+            <p:ph type="body" idx="1"/>
+          </p:nvPr>
+        </p:nvSpPr>
+        <p:spPr/>
+        <p:txBody>
+          <a:bodyPr/>
+          <a:lstStyle/>
+          <a:p>
+            <a:r>
+              <a:rPr lang="en-US" dirty="0"/>
+              <a:t>PROF: Récap rapide — demander à 4 étudiants de résumer chaque concept en 1 phrase.
+Devoir : spécifier formellement un ADT Queue en notation impérative + VDM.
+Rappeler le lien avec le jeu en ligne (unite19-gamifie.vercel.app) pour réviser.</a:t>
+            </a:r>
+            <a:endParaRPr lang="en-US" dirty="0"/>
+          </a:p>
+        </p:txBody>
+      </p:sp>
+      <p:sp>
+        <p:nvSpPr>
+          <p:cNvPr id="4" name="Slide Number Placeholder 3"/>
+          <p:cNvSpPr>
+            <a:spLocks noGrp="1"/>
+          </p:cNvSpPr>
+          <p:nvPr>
+            <p:ph type="sldNum" sz="quarter" idx="10"/>
+          </p:nvPr>
+        </p:nvSpPr>
+        <p:spPr/>
+        <p:txBody>
+          <a:bodyPr/>
+          <a:lstStyle/>
+          <a:p>
+            <a:fld id="{F7021451-1387-4CA6-816F-3879F97B5CBC}" type="slidenum">
+              <a:rPr lang="en-US"/>
+              <a:t>9</a:t>
             </a:fld>
             <a:endParaRPr lang="en-US"/>
           </a:p>
@@ -1302,7 +1605,7 @@
     <p:bg>
       <p:bgPr>
         <a:solidFill>
-          <a:srgbClr val="1B2A4A"/>
+          <a:srgbClr val="0B2027"/>
         </a:solidFill>
       </p:bgPr>
     </p:bg>
@@ -1329,13 +1632,13 @@
         <p:spPr>
           <a:xfrm>
             <a:off x="0" y="0"/>
-            <a:ext cx="9144000" cy="1097280"/>
+            <a:ext cx="9144000" cy="73152"/>
           </a:xfrm>
           <a:prstGeom prst="rect">
             <a:avLst/>
           </a:prstGeom>
           <a:solidFill>
-            <a:srgbClr val="065A82"/>
+            <a:srgbClr val="0891B2"/>
           </a:solidFill>
           <a:ln/>
         </p:spPr>
@@ -1348,7 +1651,7 @@
         </p:nvSpPr>
         <p:spPr>
           <a:xfrm>
-            <a:off x="731520" y="137160"/>
+            <a:off x="548640" y="365760"/>
             <a:ext cx="2743200" cy="365760"/>
           </a:xfrm>
           <a:prstGeom prst="rect">
@@ -1365,9 +1668,9 @@
               <a:buNone/>
             </a:pPr>
             <a:r>
-              <a:rPr lang="en-US" sz="1400" b="1" dirty="0">
-                <a:solidFill>
-                  <a:srgbClr val="00A896"/>
+              <a:rPr lang="en-US" sz="1200" b="1" spc="400" kern="0" dirty="0">
+                <a:solidFill>
+                  <a:srgbClr val="0891B2"/>
                 </a:solidFill>
                 <a:latin typeface="Calibri" pitchFamily="34" charset="0"/>
                 <a:ea typeface="Calibri" pitchFamily="34" charset="-122"/>
@@ -1375,7 +1678,7 @@
               </a:rPr>
               <a:t>MONDE 2</a:t>
             </a:r>
-            <a:endParaRPr lang="en-US" sz="1400" dirty="0"/>
+            <a:endParaRPr lang="en-US" sz="1200" dirty="0"/>
           </a:p>
         </p:txBody>
       </p:sp>
@@ -1387,8 +1690,8 @@
         </p:nvSpPr>
         <p:spPr>
           <a:xfrm>
-            <a:off x="731520" y="457200"/>
-            <a:ext cx="7315200" cy="457200"/>
+            <a:off x="548640" y="731520"/>
+            <a:ext cx="7315200" cy="365760"/>
           </a:xfrm>
           <a:prstGeom prst="rect">
             <a:avLst/>
@@ -1404,9 +1707,9 @@
               <a:buNone/>
             </a:pPr>
             <a:r>
-              <a:rPr lang="en-US" sz="1200" dirty="0">
-                <a:solidFill>
-                  <a:srgbClr val="E2E8F0"/>
+              <a:rPr lang="en-US" sz="1100" dirty="0">
+                <a:solidFill>
+                  <a:srgbClr val="94A3B8"/>
                 </a:solidFill>
                 <a:latin typeface="Calibri" pitchFamily="34" charset="0"/>
                 <a:ea typeface="Calibri" pitchFamily="34" charset="-122"/>
@@ -1414,7 +1717,7 @@
               </a:rPr>
               <a:t>UNIT 19 : Data Structures &amp; Algorithms</a:t>
             </a:r>
-            <a:endParaRPr lang="en-US" sz="1200" dirty="0"/>
+            <a:endParaRPr lang="en-US" sz="1100" dirty="0"/>
           </a:p>
         </p:txBody>
       </p:sp>
@@ -1426,8 +1729,8 @@
         </p:nvSpPr>
         <p:spPr>
           <a:xfrm>
-            <a:off x="731520" y="1645920"/>
-            <a:ext cx="7315200" cy="640080"/>
+            <a:off x="548640" y="1371600"/>
+            <a:ext cx="8229600" cy="457200"/>
           </a:xfrm>
           <a:prstGeom prst="rect">
             <a:avLst/>
@@ -1443,17 +1746,17 @@
               <a:buNone/>
             </a:pPr>
             <a:r>
-              <a:rPr lang="en-US" sz="4400" b="1" dirty="0">
-                <a:solidFill>
-                  <a:srgbClr val="FFFFFF"/>
-                </a:solidFill>
-                <a:latin typeface="Trebuchet MS" pitchFamily="34" charset="0"/>
-                <a:ea typeface="Trebuchet MS" pitchFamily="34" charset="-122"/>
-                <a:cs typeface="Trebuchet MS" pitchFamily="34" charset="-120"/>
+              <a:rPr lang="en-US" sz="1400" b="1" dirty="0">
+                <a:solidFill>
+                  <a:srgbClr val="0891B2"/>
+                </a:solidFill>
+                <a:latin typeface="Calibri" pitchFamily="34" charset="0"/>
+                <a:ea typeface="Calibri" pitchFamily="34" charset="-122"/>
+                <a:cs typeface="Calibri" pitchFamily="34" charset="-120"/>
               </a:rPr>
               <a:t>Chapitre 5</a:t>
             </a:r>
-            <a:endParaRPr lang="en-US" sz="4400" dirty="0"/>
+            <a:endParaRPr lang="en-US" sz="1400" dirty="0"/>
           </a:p>
         </p:txBody>
       </p:sp>
@@ -1465,8 +1768,8 @@
         </p:nvSpPr>
         <p:spPr>
           <a:xfrm>
-            <a:off x="731520" y="2286000"/>
-            <a:ext cx="7315200" cy="1097280"/>
+            <a:off x="548640" y="2011680"/>
+            <a:ext cx="8229600" cy="1371600"/>
           </a:xfrm>
           <a:prstGeom prst="rect">
             <a:avLst/>
@@ -1482,95 +1785,95 @@
               <a:buNone/>
             </a:pPr>
             <a:r>
-              <a:rPr lang="en-US" sz="3000" b="1" dirty="0">
-                <a:solidFill>
-                  <a:srgbClr val="00A896"/>
-                </a:solidFill>
-                <a:latin typeface="Trebuchet MS" pitchFamily="34" charset="0"/>
-                <a:ea typeface="Trebuchet MS" pitchFamily="34" charset="-122"/>
-                <a:cs typeface="Trebuchet MS" pitchFamily="34" charset="-120"/>
-              </a:rPr>
-              <a:t>Spécifier un Stack</a:t>
-            </a:r>
-            <a:endParaRPr lang="en-US" sz="3000" dirty="0"/>
+              <a:rPr lang="en-US" sz="3600" b="1" dirty="0">
+                <a:solidFill>
+                  <a:srgbClr val="FFFFFF"/>
+                </a:solidFill>
+                <a:latin typeface="Calibri" pitchFamily="34" charset="0"/>
+                <a:ea typeface="Calibri" pitchFamily="34" charset="-122"/>
+                <a:cs typeface="Calibri" pitchFamily="34" charset="-120"/>
+              </a:rPr>
+              <a:t>Spécification Formelle</a:t>
+            </a:r>
+            <a:endParaRPr lang="en-US" sz="3600" dirty="0"/>
           </a:p>
           <a:p>
             <a:pPr indent="0" marL="0">
               <a:buNone/>
             </a:pPr>
             <a:r>
-              <a:rPr lang="en-US" sz="3000" b="1" dirty="0">
-                <a:solidFill>
-                  <a:srgbClr val="00A896"/>
-                </a:solidFill>
-                <a:latin typeface="Trebuchet MS" pitchFamily="34" charset="0"/>
-                <a:ea typeface="Trebuchet MS" pitchFamily="34" charset="-122"/>
-                <a:cs typeface="Trebuchet MS" pitchFamily="34" charset="-120"/>
-              </a:rPr>
-              <a:t>en notation impérative</a:t>
-            </a:r>
-            <a:endParaRPr lang="en-US" sz="3000" dirty="0"/>
-          </a:p>
-        </p:txBody>
-      </p:sp>
-      <p:sp>
-        <p:nvSpPr>
-          <p:cNvPr id="7" name="Shape 5"/>
-          <p:cNvSpPr/>
-          <p:nvPr/>
-        </p:nvSpPr>
-        <p:spPr>
-          <a:xfrm>
-            <a:off x="731520" y="3657600"/>
-            <a:ext cx="2286000" cy="54864"/>
+              <a:rPr lang="en-US" sz="3600" b="1" dirty="0">
+                <a:solidFill>
+                  <a:srgbClr val="FFFFFF"/>
+                </a:solidFill>
+                <a:latin typeface="Calibri" pitchFamily="34" charset="0"/>
+                <a:ea typeface="Calibri" pitchFamily="34" charset="-122"/>
+                <a:cs typeface="Calibri" pitchFamily="34" charset="-120"/>
+              </a:rPr>
+              <a:t>d'un ADT Stack</a:t>
+            </a:r>
+            <a:endParaRPr lang="en-US" sz="3600" dirty="0"/>
+          </a:p>
+        </p:txBody>
+      </p:sp>
+      <p:sp>
+        <p:nvSpPr>
+          <p:cNvPr id="7" name="Text 5"/>
+          <p:cNvSpPr/>
+          <p:nvPr/>
+        </p:nvSpPr>
+        <p:spPr>
+          <a:xfrm>
+            <a:off x="548640" y="3657600"/>
+            <a:ext cx="8229600" cy="365760"/>
           </a:xfrm>
           <a:prstGeom prst="rect">
             <a:avLst/>
           </a:prstGeom>
-          <a:solidFill>
-            <a:srgbClr val="F97316"/>
-          </a:solidFill>
-          <a:ln/>
-        </p:spPr>
-      </p:sp>
-      <p:sp>
-        <p:nvSpPr>
-          <p:cNvPr id="8" name="Text 6"/>
-          <p:cNvSpPr/>
-          <p:nvPr/>
-        </p:nvSpPr>
-        <p:spPr>
-          <a:xfrm>
-            <a:off x="731520" y="3840480"/>
-            <a:ext cx="7315200" cy="731520"/>
+          <a:noFill/>
+          <a:ln/>
+        </p:spPr>
+        <p:txBody>
+          <a:bodyPr wrap="square" rtlCol="0" anchor="ctr"/>
+          <a:lstStyle/>
+          <a:p>
+            <a:pPr indent="0" marL="0">
+              <a:buNone/>
+            </a:pPr>
+            <a:r>
+              <a:rPr lang="en-US" sz="1300" dirty="0">
+                <a:solidFill>
+                  <a:srgbClr val="94A3B8"/>
+                </a:solidFill>
+                <a:latin typeface="Calibri" pitchFamily="34" charset="0"/>
+                <a:ea typeface="Calibri" pitchFamily="34" charset="-122"/>
+                <a:cs typeface="Calibri" pitchFamily="34" charset="-120"/>
+              </a:rPr>
+              <a:t>Critère P3 — Notation impérative, VDM, SDL, ASN.1</a:t>
+            </a:r>
+            <a:endParaRPr lang="en-US" sz="1300" dirty="0"/>
+          </a:p>
+        </p:txBody>
+      </p:sp>
+      <p:sp>
+        <p:nvSpPr>
+          <p:cNvPr id="8" name="Shape 6"/>
+          <p:cNvSpPr/>
+          <p:nvPr/>
+        </p:nvSpPr>
+        <p:spPr>
+          <a:xfrm>
+            <a:off x="0" y="5074920"/>
+            <a:ext cx="9144000" cy="73152"/>
           </a:xfrm>
           <a:prstGeom prst="rect">
             <a:avLst/>
           </a:prstGeom>
-          <a:noFill/>
-          <a:ln/>
-        </p:spPr>
-        <p:txBody>
-          <a:bodyPr wrap="square" rtlCol="0" anchor="ctr"/>
-          <a:lstStyle/>
-          <a:p>
-            <a:pPr indent="0" marL="0">
-              <a:buNone/>
-            </a:pPr>
-            <a:r>
-              <a:rPr lang="en-US" sz="1300" i="1" dirty="0">
-                <a:solidFill>
-                  <a:srgbClr val="E2E8F0"/>
-                </a:solidFill>
-                <a:latin typeface="Calibri" pitchFamily="34" charset="0"/>
-                <a:ea typeface="Calibri" pitchFamily="34" charset="-122"/>
-                <a:cs typeface="Calibri" pitchFamily="34" charset="-120"/>
-              </a:rPr>
-              <a:t>P3</a:t>
-            </a:r>
-            <a:endParaRPr lang="en-US" sz="1300" dirty="0"/>
-          </a:p>
-        </p:txBody>
+          <a:solidFill>
+            <a:srgbClr val="0891B2"/>
+          </a:solidFill>
+          <a:ln/>
+        </p:spPr>
       </p:sp>
     </p:spTree>
   </p:cSld>
@@ -1586,7 +1889,7 @@
     <p:bg>
       <p:bgPr>
         <a:solidFill>
-          <a:srgbClr val="F8FAFC"/>
+          <a:srgbClr val="0B2027"/>
         </a:solidFill>
       </p:bgPr>
     </p:bg>
@@ -1613,13 +1916,13 @@
         <p:spPr>
           <a:xfrm>
             <a:off x="0" y="0"/>
-            <a:ext cx="109728" cy="5143500"/>
+            <a:ext cx="9144000" cy="54864"/>
           </a:xfrm>
           <a:prstGeom prst="rect">
             <a:avLst/>
           </a:prstGeom>
           <a:solidFill>
-            <a:srgbClr val="028090"/>
+            <a:srgbClr val="0891B2"/>
           </a:solidFill>
           <a:ln/>
         </p:spPr>
@@ -1632,7 +1935,7 @@
         </p:nvSpPr>
         <p:spPr>
           <a:xfrm>
-            <a:off x="457200" y="274320"/>
+            <a:off x="548640" y="274320"/>
             <a:ext cx="8229600" cy="548640"/>
           </a:xfrm>
           <a:prstGeom prst="rect">
@@ -1649,17 +1952,17 @@
               <a:buNone/>
             </a:pPr>
             <a:r>
-              <a:rPr lang="en-US" sz="2600" b="1" dirty="0">
-                <a:solidFill>
-                  <a:srgbClr val="1B2A4A"/>
-                </a:solidFill>
-                <a:latin typeface="Trebuchet MS" pitchFamily="34" charset="0"/>
-                <a:ea typeface="Trebuchet MS" pitchFamily="34" charset="-122"/>
-                <a:cs typeface="Trebuchet MS" pitchFamily="34" charset="-120"/>
+              <a:rPr lang="en-US" sz="2400" b="1" dirty="0">
+                <a:solidFill>
+                  <a:srgbClr val="FFFFFF"/>
+                </a:solidFill>
+                <a:latin typeface="Calibri" pitchFamily="34" charset="0"/>
+                <a:ea typeface="Calibri" pitchFamily="34" charset="-122"/>
+                <a:cs typeface="Calibri" pitchFamily="34" charset="-120"/>
               </a:rPr>
               <a:t>Qu'est-ce qu'une notation impérative ?</a:t>
             </a:r>
-            <a:endParaRPr lang="en-US" sz="2600" dirty="0"/>
+            <a:endParaRPr lang="en-US" sz="2400" dirty="0"/>
           </a:p>
         </p:txBody>
       </p:sp>
@@ -1671,8 +1974,8 @@
         </p:nvSpPr>
         <p:spPr>
           <a:xfrm>
-            <a:off x="640080" y="1005840"/>
-            <a:ext cx="7772400" cy="457200"/>
+            <a:off x="548640" y="1005840"/>
+            <a:ext cx="8046720" cy="3657600"/>
           </a:xfrm>
           <a:prstGeom prst="rect">
             <a:avLst/>
@@ -1681,223 +1984,110 @@
           <a:ln/>
         </p:spPr>
         <p:txBody>
-          <a:bodyPr wrap="square" rtlCol="0" anchor="ctr"/>
+          <a:bodyPr wrap="square" rtlCol="0" anchor="t"/>
           <a:lstStyle/>
           <a:p>
             <a:pPr marL="342900" indent="-342900">
+              <a:lnSpc>
+                <a:spcPct val="130000"/>
+              </a:lnSpc>
               <a:buSzPct val="100000"/>
               <a:buChar char="•"/>
             </a:pPr>
             <a:r>
               <a:rPr lang="en-US" sz="1400" dirty="0">
                 <a:solidFill>
-                  <a:srgbClr val="334155"/>
-                </a:solidFill>
-                <a:latin typeface="Calibri" pitchFamily="34" charset="0"/>
-                <a:ea typeface="Calibri" pitchFamily="34" charset="-122"/>
-                <a:cs typeface="Calibri" pitchFamily="34" charset="-120"/>
-              </a:rPr>
-              <a:t>Une façon STRUCTURÉE de décrire un ADT avec des mots-clés : OPERATION, PRE, POST, INVARIANT</a:t>
+                  <a:srgbClr val="E2E8F0"/>
+                </a:solidFill>
+                <a:latin typeface="Calibri" pitchFamily="34" charset="0"/>
+                <a:ea typeface="Calibri" pitchFamily="34" charset="-122"/>
+                <a:cs typeface="Calibri" pitchFamily="34" charset="-120"/>
+              </a:rPr>
+              <a:t>Une façon STRUCTURÉE de décrire un ADT avec des mots-clés</a:t>
             </a:r>
             <a:endParaRPr lang="en-US" sz="1400" dirty="0"/>
           </a:p>
-        </p:txBody>
-      </p:sp>
-      <p:sp>
-        <p:nvSpPr>
-          <p:cNvPr id="5" name="Text 3"/>
-          <p:cNvSpPr/>
-          <p:nvPr/>
-        </p:nvSpPr>
-        <p:spPr>
-          <a:xfrm>
-            <a:off x="640080" y="1554480"/>
-            <a:ext cx="7772400" cy="457200"/>
-          </a:xfrm>
-          <a:prstGeom prst="rect">
-            <a:avLst/>
-          </a:prstGeom>
-          <a:noFill/>
-          <a:ln/>
-        </p:spPr>
-        <p:txBody>
-          <a:bodyPr wrap="square" rtlCol="0" anchor="ctr"/>
-          <a:lstStyle/>
           <a:p>
             <a:pPr marL="342900" indent="-342900">
+              <a:lnSpc>
+                <a:spcPct val="130000"/>
+              </a:lnSpc>
               <a:buSzPct val="100000"/>
               <a:buChar char="•"/>
             </a:pPr>
             <a:r>
               <a:rPr lang="en-US" sz="1400" dirty="0">
                 <a:solidFill>
-                  <a:srgbClr val="334155"/>
-                </a:solidFill>
-                <a:latin typeface="Calibri" pitchFamily="34" charset="0"/>
-                <a:ea typeface="Calibri" pitchFamily="34" charset="-122"/>
-                <a:cs typeface="Calibri" pitchFamily="34" charset="-120"/>
-              </a:rPr>
-              <a:t>Pas du code Java — c'est du pseudo-code formel, indépendant du langage</a:t>
+                  <a:srgbClr val="E2E8F0"/>
+                </a:solidFill>
+                <a:latin typeface="Calibri" pitchFamily="34" charset="0"/>
+                <a:ea typeface="Calibri" pitchFamily="34" charset="-122"/>
+                <a:cs typeface="Calibri" pitchFamily="34" charset="-120"/>
+              </a:rPr>
+              <a:t>OPERATION, PRE (précondition), POST (postcondition)</a:t>
             </a:r>
             <a:endParaRPr lang="en-US" sz="1400" dirty="0"/>
           </a:p>
-        </p:txBody>
-      </p:sp>
-      <p:sp>
-        <p:nvSpPr>
-          <p:cNvPr id="6" name="Text 4"/>
-          <p:cNvSpPr/>
-          <p:nvPr/>
-        </p:nvSpPr>
-        <p:spPr>
-          <a:xfrm>
-            <a:off x="640080" y="2103120"/>
-            <a:ext cx="7772400" cy="457200"/>
-          </a:xfrm>
-          <a:prstGeom prst="rect">
-            <a:avLst/>
-          </a:prstGeom>
-          <a:noFill/>
-          <a:ln/>
-        </p:spPr>
-        <p:txBody>
-          <a:bodyPr wrap="square" rtlCol="0" anchor="ctr"/>
-          <a:lstStyle/>
           <a:p>
             <a:pPr marL="342900" indent="-342900">
+              <a:lnSpc>
+                <a:spcPct val="130000"/>
+              </a:lnSpc>
               <a:buSzPct val="100000"/>
               <a:buChar char="•"/>
             </a:pPr>
             <a:r>
               <a:rPr lang="en-US" sz="1400" dirty="0">
                 <a:solidFill>
-                  <a:srgbClr val="334155"/>
-                </a:solidFill>
-                <a:latin typeface="Calibri" pitchFamily="34" charset="0"/>
-                <a:ea typeface="Calibri" pitchFamily="34" charset="-122"/>
-                <a:cs typeface="Calibri" pitchFamily="34" charset="-120"/>
-              </a:rPr>
-              <a:t>Chaque opération est décrite par sa signature, ses préconditions et postconditions</a:t>
+                  <a:srgbClr val="E2E8F0"/>
+                </a:solidFill>
+                <a:latin typeface="Calibri" pitchFamily="34" charset="0"/>
+                <a:ea typeface="Calibri" pitchFamily="34" charset="-122"/>
+                <a:cs typeface="Calibri" pitchFamily="34" charset="-120"/>
+              </a:rPr>
+              <a:t>Pas du code Java — c'est du pseudo-code formel</a:t>
             </a:r>
             <a:endParaRPr lang="en-US" sz="1400" dirty="0"/>
           </a:p>
-        </p:txBody>
-      </p:sp>
-      <p:sp>
-        <p:nvSpPr>
-          <p:cNvPr id="7" name="Text 5"/>
-          <p:cNvSpPr/>
-          <p:nvPr/>
-        </p:nvSpPr>
-        <p:spPr>
-          <a:xfrm>
-            <a:off x="640080" y="2651760"/>
-            <a:ext cx="7772400" cy="457200"/>
-          </a:xfrm>
-          <a:prstGeom prst="rect">
-            <a:avLst/>
-          </a:prstGeom>
-          <a:noFill/>
-          <a:ln/>
-        </p:spPr>
-        <p:txBody>
-          <a:bodyPr wrap="square" rtlCol="0" anchor="ctr"/>
-          <a:lstStyle/>
           <a:p>
             <a:pPr marL="342900" indent="-342900">
+              <a:lnSpc>
+                <a:spcPct val="130000"/>
+              </a:lnSpc>
               <a:buSzPct val="100000"/>
               <a:buChar char="•"/>
             </a:pPr>
             <a:r>
               <a:rPr lang="en-US" sz="1400" dirty="0">
                 <a:solidFill>
-                  <a:srgbClr val="334155"/>
-                </a:solidFill>
-                <a:latin typeface="Calibri" pitchFamily="34" charset="0"/>
-                <a:ea typeface="Calibri" pitchFamily="34" charset="-122"/>
-                <a:cs typeface="Calibri" pitchFamily="34" charset="-120"/>
-              </a:rPr>
-              <a:t>Les invariants décrivent les propriétés toujours vraies de la structure</a:t>
+                  <a:srgbClr val="E2E8F0"/>
+                </a:solidFill>
+                <a:latin typeface="Calibri" pitchFamily="34" charset="0"/>
+                <a:ea typeface="Calibri" pitchFamily="34" charset="-122"/>
+                <a:cs typeface="Calibri" pitchFamily="34" charset="-120"/>
+              </a:rPr>
+              <a:t>Indépendant du langage de programmation</a:t>
             </a:r>
             <a:endParaRPr lang="en-US" sz="1400" dirty="0"/>
           </a:p>
-        </p:txBody>
-      </p:sp>
-      <p:sp>
-        <p:nvSpPr>
-          <p:cNvPr id="8" name="Text 6"/>
-          <p:cNvSpPr/>
-          <p:nvPr/>
-        </p:nvSpPr>
-        <p:spPr>
-          <a:xfrm>
-            <a:off x="640080" y="3200400"/>
-            <a:ext cx="7772400" cy="457200"/>
-          </a:xfrm>
-          <a:prstGeom prst="rect">
-            <a:avLst/>
-          </a:prstGeom>
-          <a:noFill/>
-          <a:ln/>
-        </p:spPr>
-        <p:txBody>
-          <a:bodyPr wrap="square" rtlCol="0" anchor="ctr"/>
-          <a:lstStyle/>
           <a:p>
             <a:pPr marL="342900" indent="-342900">
+              <a:lnSpc>
+                <a:spcPct val="130000"/>
+              </a:lnSpc>
               <a:buSzPct val="100000"/>
               <a:buChar char="•"/>
             </a:pPr>
             <a:r>
               <a:rPr lang="en-US" sz="1400" dirty="0">
                 <a:solidFill>
-                  <a:srgbClr val="334155"/>
-                </a:solidFill>
-                <a:latin typeface="Calibri" pitchFamily="34" charset="0"/>
-                <a:ea typeface="Calibri" pitchFamily="34" charset="-122"/>
-                <a:cs typeface="Calibri" pitchFamily="34" charset="-120"/>
-              </a:rPr>
-              <a:t>C'est le CONTRAT entre le concepteur et l'utilisateur de l'ADT</a:t>
-            </a:r>
-            <a:endParaRPr lang="en-US" sz="1400" dirty="0"/>
-          </a:p>
-        </p:txBody>
-      </p:sp>
-      <p:sp>
-        <p:nvSpPr>
-          <p:cNvPr id="9" name="Text 7"/>
-          <p:cNvSpPr/>
-          <p:nvPr/>
-        </p:nvSpPr>
-        <p:spPr>
-          <a:xfrm>
-            <a:off x="640080" y="3749040"/>
-            <a:ext cx="7772400" cy="457200"/>
-          </a:xfrm>
-          <a:prstGeom prst="rect">
-            <a:avLst/>
-          </a:prstGeom>
-          <a:noFill/>
-          <a:ln/>
-        </p:spPr>
-        <p:txBody>
-          <a:bodyPr wrap="square" rtlCol="0" anchor="ctr"/>
-          <a:lstStyle/>
-          <a:p>
-            <a:pPr marL="342900" indent="-342900">
-              <a:buSzPct val="100000"/>
-              <a:buChar char="•"/>
-            </a:pPr>
-            <a:r>
-              <a:rPr lang="en-US" sz="1400" dirty="0">
-                <a:solidFill>
-                  <a:srgbClr val="334155"/>
-                </a:solidFill>
-                <a:latin typeface="Calibri" pitchFamily="34" charset="0"/>
-                <a:ea typeface="Calibri" pitchFamily="34" charset="-122"/>
-                <a:cs typeface="Calibri" pitchFamily="34" charset="-120"/>
-              </a:rPr>
-              <a:t>Avantage : on peut vérifier la correction AVANT de coder</a:t>
+                  <a:srgbClr val="E2E8F0"/>
+                </a:solidFill>
+                <a:latin typeface="Calibri" pitchFamily="34" charset="0"/>
+                <a:ea typeface="Calibri" pitchFamily="34" charset="-122"/>
+                <a:cs typeface="Calibri" pitchFamily="34" charset="-120"/>
+              </a:rPr>
+              <a:t>Objectif : décrire le QUOI sans le COMMENT</a:t>
             </a:r>
             <a:endParaRPr lang="en-US" sz="1400" dirty="0"/>
           </a:p>
@@ -1917,7 +2107,7 @@
     <p:bg>
       <p:bgPr>
         <a:solidFill>
-          <a:srgbClr val="F8FAFC"/>
+          <a:srgbClr val="0B2027"/>
         </a:solidFill>
       </p:bgPr>
     </p:bg>
@@ -1944,13 +2134,13 @@
         <p:spPr>
           <a:xfrm>
             <a:off x="0" y="0"/>
-            <a:ext cx="109728" cy="5143500"/>
+            <a:ext cx="9144000" cy="54864"/>
           </a:xfrm>
           <a:prstGeom prst="rect">
             <a:avLst/>
           </a:prstGeom>
           <a:solidFill>
-            <a:srgbClr val="028090"/>
+            <a:srgbClr val="0891B2"/>
           </a:solidFill>
           <a:ln/>
         </p:spPr>
@@ -1963,8 +2153,8 @@
         </p:nvSpPr>
         <p:spPr>
           <a:xfrm>
-            <a:off x="457200" y="274320"/>
-            <a:ext cx="8229600" cy="457200"/>
+            <a:off x="548640" y="274320"/>
+            <a:ext cx="8229600" cy="548640"/>
           </a:xfrm>
           <a:prstGeom prst="rect">
             <a:avLst/>
@@ -1980,50 +2170,182 @@
               <a:buNone/>
             </a:pPr>
             <a:r>
-              <a:rPr lang="en-US" sz="2600" b="1" dirty="0">
-                <a:solidFill>
-                  <a:srgbClr val="1B2A4A"/>
-                </a:solidFill>
-                <a:latin typeface="Trebuchet MS" pitchFamily="34" charset="0"/>
-                <a:ea typeface="Trebuchet MS" pitchFamily="34" charset="-122"/>
-                <a:cs typeface="Trebuchet MS" pitchFamily="34" charset="-120"/>
+              <a:rPr lang="en-US" sz="2400" b="1" dirty="0">
+                <a:solidFill>
+                  <a:srgbClr val="FFFFFF"/>
+                </a:solidFill>
+                <a:latin typeface="Calibri" pitchFamily="34" charset="0"/>
+                <a:ea typeface="Calibri" pitchFamily="34" charset="-122"/>
+                <a:cs typeface="Calibri" pitchFamily="34" charset="-120"/>
               </a:rPr>
               <a:t>Notation impérative : Stack</a:t>
             </a:r>
-            <a:endParaRPr lang="en-US" sz="2600" dirty="0"/>
-          </a:p>
-        </p:txBody>
-      </p:sp>
-      <p:sp>
-        <p:nvSpPr>
-          <p:cNvPr id="4" name="Shape 2"/>
-          <p:cNvSpPr/>
-          <p:nvPr/>
-        </p:nvSpPr>
-        <p:spPr>
-          <a:xfrm>
-            <a:off x="457200" y="822960"/>
-            <a:ext cx="8229600" cy="3840480"/>
+            <a:endParaRPr lang="en-US" sz="2400" dirty="0"/>
+          </a:p>
+        </p:txBody>
+      </p:sp>
+      <p:sp>
+        <p:nvSpPr>
+          <p:cNvPr id="4" name="Text 2"/>
+          <p:cNvSpPr/>
+          <p:nvPr/>
+        </p:nvSpPr>
+        <p:spPr>
+          <a:xfrm>
+            <a:off x="548640" y="1005840"/>
+            <a:ext cx="3840480" cy="3200400"/>
           </a:xfrm>
           <a:prstGeom prst="rect">
             <a:avLst/>
           </a:prstGeom>
+          <a:noFill/>
+          <a:ln/>
+        </p:spPr>
+        <p:txBody>
+          <a:bodyPr wrap="square" rtlCol="0" anchor="t"/>
+          <a:lstStyle/>
+          <a:p>
+            <a:pPr marL="342900" indent="-342900">
+              <a:buSzPct val="100000"/>
+              <a:buChar char="•"/>
+            </a:pPr>
+            <a:r>
+              <a:rPr lang="en-US" sz="1300" dirty="0">
+                <a:solidFill>
+                  <a:srgbClr val="E2E8F0"/>
+                </a:solidFill>
+                <a:latin typeface="Calibri" pitchFamily="34" charset="0"/>
+                <a:ea typeface="Calibri" pitchFamily="34" charset="-122"/>
+                <a:cs typeface="Calibri" pitchFamily="34" charset="-120"/>
+              </a:rPr>
+              <a:t>ADT Stack&lt;E&gt; — type générique</a:t>
+            </a:r>
+            <a:endParaRPr lang="en-US" sz="1300" dirty="0"/>
+          </a:p>
+          <a:p>
+            <a:pPr marL="342900" indent="-342900">
+              <a:buSzPct val="100000"/>
+              <a:buChar char="•"/>
+            </a:pPr>
+            <a:r>
+              <a:rPr lang="en-US" sz="1300" dirty="0">
+                <a:solidFill>
+                  <a:srgbClr val="E2E8F0"/>
+                </a:solidFill>
+                <a:latin typeface="Calibri" pitchFamily="34" charset="0"/>
+                <a:ea typeface="Calibri" pitchFamily="34" charset="-122"/>
+                <a:cs typeface="Calibri" pitchFamily="34" charset="-120"/>
+              </a:rPr>
+              <a:t>DESCRIPTION: Collection LIFO</a:t>
+            </a:r>
+            <a:endParaRPr lang="en-US" sz="1300" dirty="0"/>
+          </a:p>
+          <a:p>
+            <a:pPr marL="342900" indent="-342900">
+              <a:buSzPct val="100000"/>
+              <a:buChar char="•"/>
+            </a:pPr>
+            <a:r>
+              <a:rPr lang="en-US" sz="1300" dirty="0">
+                <a:solidFill>
+                  <a:srgbClr val="E2E8F0"/>
+                </a:solidFill>
+                <a:latin typeface="Calibri" pitchFamily="34" charset="0"/>
+                <a:ea typeface="Calibri" pitchFamily="34" charset="-122"/>
+                <a:cs typeface="Calibri" pitchFamily="34" charset="-120"/>
+              </a:rPr>
+              <a:t>5 opérations : push, pop, peek, isEmpty, size</a:t>
+            </a:r>
+            <a:endParaRPr lang="en-US" sz="1300" dirty="0"/>
+          </a:p>
+          <a:p>
+            <a:pPr marL="342900" indent="-342900">
+              <a:buSzPct val="100000"/>
+              <a:buChar char="•"/>
+            </a:pPr>
+            <a:r>
+              <a:rPr lang="en-US" sz="1300" dirty="0">
+                <a:solidFill>
+                  <a:srgbClr val="E2E8F0"/>
+                </a:solidFill>
+                <a:latin typeface="Calibri" pitchFamily="34" charset="0"/>
+                <a:ea typeface="Calibri" pitchFamily="34" charset="-122"/>
+                <a:cs typeface="Calibri" pitchFamily="34" charset="-120"/>
+              </a:rPr>
+              <a:t>Chaque opération a PRE et POST</a:t>
+            </a:r>
+            <a:endParaRPr lang="en-US" sz="1300" dirty="0"/>
+          </a:p>
+          <a:p>
+            <a:pPr marL="342900" indent="-342900">
+              <a:buSzPct val="100000"/>
+              <a:buChar char="•"/>
+            </a:pPr>
+            <a:r>
+              <a:rPr lang="en-US" sz="1300" dirty="0">
+                <a:solidFill>
+                  <a:srgbClr val="E2E8F0"/>
+                </a:solidFill>
+                <a:latin typeface="Calibri" pitchFamily="34" charset="0"/>
+                <a:ea typeface="Calibri" pitchFamily="34" charset="-122"/>
+                <a:cs typeface="Calibri" pitchFamily="34" charset="-120"/>
+              </a:rPr>
+              <a:t>INVARIANT: size() &gt;= 0</a:t>
+            </a:r>
+            <a:endParaRPr lang="en-US" sz="1300" dirty="0"/>
+          </a:p>
+          <a:p>
+            <a:pPr marL="342900" indent="-342900">
+              <a:buSzPct val="100000"/>
+              <a:buChar char="•"/>
+            </a:pPr>
+            <a:r>
+              <a:rPr lang="en-US" sz="1300" dirty="0">
+                <a:solidFill>
+                  <a:srgbClr val="E2E8F0"/>
+                </a:solidFill>
+                <a:latin typeface="Calibri" pitchFamily="34" charset="0"/>
+                <a:ea typeface="Calibri" pitchFamily="34" charset="-122"/>
+                <a:cs typeface="Calibri" pitchFamily="34" charset="-120"/>
+              </a:rPr>
+              <a:t>AXIOME: pop(push(S,e)) = &lt;e, S&gt;</a:t>
+            </a:r>
+            <a:endParaRPr lang="en-US" sz="1300" dirty="0"/>
+          </a:p>
+        </p:txBody>
+      </p:sp>
+      <p:sp>
+        <p:nvSpPr>
+          <p:cNvPr id="5" name="Shape 3"/>
+          <p:cNvSpPr/>
+          <p:nvPr/>
+        </p:nvSpPr>
+        <p:spPr>
+          <a:xfrm>
+            <a:off x="4754880" y="1005840"/>
+            <a:ext cx="4023360" cy="3200400"/>
+          </a:xfrm>
+          <a:prstGeom prst="roundRect">
+            <a:avLst>
+              <a:gd name="adj" fmla="val 2857"/>
+            </a:avLst>
+          </a:prstGeom>
           <a:solidFill>
-            <a:srgbClr val="1E293B"/>
+            <a:srgbClr val="0D1117"/>
           </a:solidFill>
           <a:ln/>
         </p:spPr>
       </p:sp>
       <p:sp>
         <p:nvSpPr>
-          <p:cNvPr id="5" name="Text 3"/>
-          <p:cNvSpPr/>
-          <p:nvPr/>
-        </p:nvSpPr>
-        <p:spPr>
-          <a:xfrm>
-            <a:off x="640080" y="914400"/>
-            <a:ext cx="7863840" cy="3657600"/>
+          <p:cNvPr id="6" name="Text 4"/>
+          <p:cNvSpPr/>
+          <p:nvPr/>
+        </p:nvSpPr>
+        <p:spPr>
+          <a:xfrm>
+            <a:off x="4937760" y="1143000"/>
+            <a:ext cx="3657600" cy="2926080"/>
           </a:xfrm>
           <a:prstGeom prst="rect">
             <a:avLst/>
@@ -2032,16 +2354,16 @@
           <a:ln/>
         </p:spPr>
         <p:txBody>
-          <a:bodyPr wrap="square" rtlCol="0" anchor="ctr"/>
+          <a:bodyPr wrap="square" rtlCol="0" anchor="t"/>
           <a:lstStyle/>
           <a:p>
             <a:pPr indent="0" marL="0">
               <a:buNone/>
             </a:pPr>
             <a:r>
-              <a:rPr lang="en-US" sz="1100" dirty="0">
-                <a:solidFill>
-                  <a:srgbClr val="E2E8F0"/>
+              <a:rPr lang="en-US" sz="1000" dirty="0">
+                <a:solidFill>
+                  <a:srgbClr val="A5F3FC"/>
                 </a:solidFill>
                 <a:latin typeface="Consolas" pitchFamily="34" charset="0"/>
                 <a:ea typeface="Consolas" pitchFamily="34" charset="-122"/>
@@ -2049,22 +2371,22 @@
               </a:rPr>
               <a:t>ADT Stack&lt;E&gt;</a:t>
             </a:r>
-            <a:endParaRPr lang="en-US" sz="1100" dirty="0"/>
+            <a:endParaRPr lang="en-US" sz="1000" dirty="0"/>
           </a:p>
           <a:p>
             <a:pPr indent="0" marL="0">
               <a:buNone/>
             </a:pPr>
-            <a:endParaRPr lang="en-US" sz="1100" dirty="0"/>
+            <a:endParaRPr lang="en-US" sz="1000" dirty="0"/>
           </a:p>
           <a:p>
             <a:pPr indent="0" marL="0">
               <a:buNone/>
             </a:pPr>
             <a:r>
-              <a:rPr lang="en-US" sz="1100" dirty="0">
-                <a:solidFill>
-                  <a:srgbClr val="E2E8F0"/>
+              <a:rPr lang="en-US" sz="1000" dirty="0">
+                <a:solidFill>
+                  <a:srgbClr val="A5F3FC"/>
                 </a:solidFill>
                 <a:latin typeface="Consolas" pitchFamily="34" charset="0"/>
                 <a:ea typeface="Consolas" pitchFamily="34" charset="-122"/>
@@ -2072,417 +2394,161 @@
               </a:rPr>
               <a:t>DESCRIPTION:</a:t>
             </a:r>
-            <a:endParaRPr lang="en-US" sz="1100" dirty="0"/>
+            <a:endParaRPr lang="en-US" sz="1000" dirty="0"/>
           </a:p>
           <a:p>
             <a:pPr indent="0" marL="0">
               <a:buNone/>
             </a:pPr>
             <a:r>
-              <a:rPr lang="en-US" sz="1100" dirty="0">
-                <a:solidFill>
-                  <a:srgbClr val="E2E8F0"/>
+              <a:rPr lang="en-US" sz="1000" dirty="0">
+                <a:solidFill>
+                  <a:srgbClr val="A5F3FC"/>
                 </a:solidFill>
                 <a:latin typeface="Consolas" pitchFamily="34" charset="0"/>
                 <a:ea typeface="Consolas" pitchFamily="34" charset="-122"/>
                 <a:cs typeface="Consolas" pitchFamily="34" charset="-120"/>
               </a:rPr>
-              <a:t>  Collection LIFO (Last In, First Out).</a:t>
-            </a:r>
-            <a:endParaRPr lang="en-US" sz="1100" dirty="0"/>
+              <a:t>  Collection LIFO</a:t>
+            </a:r>
+            <a:endParaRPr lang="en-US" sz="1000" dirty="0"/>
           </a:p>
           <a:p>
             <a:pPr indent="0" marL="0">
               <a:buNone/>
             </a:pPr>
-            <a:r>
-              <a:rPr lang="en-US" sz="1100" dirty="0">
-                <a:solidFill>
-                  <a:srgbClr val="E2E8F0"/>
+            <a:endParaRPr lang="en-US" sz="1000" dirty="0"/>
+          </a:p>
+          <a:p>
+            <a:pPr indent="0" marL="0">
+              <a:buNone/>
+            </a:pPr>
+            <a:r>
+              <a:rPr lang="en-US" sz="1000" dirty="0">
+                <a:solidFill>
+                  <a:srgbClr val="A5F3FC"/>
                 </a:solidFill>
                 <a:latin typeface="Consolas" pitchFamily="34" charset="0"/>
                 <a:ea typeface="Consolas" pitchFamily="34" charset="-122"/>
                 <a:cs typeface="Consolas" pitchFamily="34" charset="-120"/>
               </a:rPr>
-              <a:t>  Le dernier élément ajouté est le premier retiré.</a:t>
-            </a:r>
-            <a:endParaRPr lang="en-US" sz="1100" dirty="0"/>
+              <a:t>OPERATION push(e: E) → void</a:t>
+            </a:r>
+            <a:endParaRPr lang="en-US" sz="1000" dirty="0"/>
           </a:p>
           <a:p>
             <a:pPr indent="0" marL="0">
               <a:buNone/>
             </a:pPr>
-            <a:endParaRPr lang="en-US" sz="1100" dirty="0"/>
-          </a:p>
-          <a:p>
-            <a:pPr indent="0" marL="0">
-              <a:buNone/>
-            </a:pPr>
-            <a:r>
-              <a:rPr lang="en-US" sz="1100" dirty="0">
-                <a:solidFill>
-                  <a:srgbClr val="E2E8F0"/>
+            <a:r>
+              <a:rPr lang="en-US" sz="1000" dirty="0">
+                <a:solidFill>
+                  <a:srgbClr val="A5F3FC"/>
                 </a:solidFill>
                 <a:latin typeface="Consolas" pitchFamily="34" charset="0"/>
                 <a:ea typeface="Consolas" pitchFamily="34" charset="-122"/>
                 <a:cs typeface="Consolas" pitchFamily="34" charset="-120"/>
               </a:rPr>
-              <a:t>OPERATIONS:</a:t>
-            </a:r>
-            <a:endParaRPr lang="en-US" sz="1100" dirty="0"/>
+              <a:t>  PRE: aucune</a:t>
+            </a:r>
+            <a:endParaRPr lang="en-US" sz="1000" dirty="0"/>
           </a:p>
           <a:p>
             <a:pPr indent="0" marL="0">
               <a:buNone/>
             </a:pPr>
             <a:r>
-              <a:rPr lang="en-US" sz="1100" dirty="0">
-                <a:solidFill>
-                  <a:srgbClr val="E2E8F0"/>
+              <a:rPr lang="en-US" sz="1000" dirty="0">
+                <a:solidFill>
+                  <a:srgbClr val="A5F3FC"/>
                 </a:solidFill>
                 <a:latin typeface="Consolas" pitchFamily="34" charset="0"/>
                 <a:ea typeface="Consolas" pitchFamily="34" charset="-122"/>
                 <a:cs typeface="Consolas" pitchFamily="34" charset="-120"/>
               </a:rPr>
-              <a:t>  OPERATION push(e: E) -&gt; void</a:t>
-            </a:r>
-            <a:endParaRPr lang="en-US" sz="1100" dirty="0"/>
+              <a:t>  POST: e au sommet, size += 1</a:t>
+            </a:r>
+            <a:endParaRPr lang="en-US" sz="1000" dirty="0"/>
           </a:p>
           <a:p>
             <a:pPr indent="0" marL="0">
               <a:buNone/>
             </a:pPr>
-            <a:r>
-              <a:rPr lang="en-US" sz="1100" dirty="0">
-                <a:solidFill>
-                  <a:srgbClr val="E2E8F0"/>
+            <a:endParaRPr lang="en-US" sz="1000" dirty="0"/>
+          </a:p>
+          <a:p>
+            <a:pPr indent="0" marL="0">
+              <a:buNone/>
+            </a:pPr>
+            <a:r>
+              <a:rPr lang="en-US" sz="1000" dirty="0">
+                <a:solidFill>
+                  <a:srgbClr val="A5F3FC"/>
                 </a:solidFill>
                 <a:latin typeface="Consolas" pitchFamily="34" charset="0"/>
                 <a:ea typeface="Consolas" pitchFamily="34" charset="-122"/>
                 <a:cs typeface="Consolas" pitchFamily="34" charset="-120"/>
               </a:rPr>
-              <a:t>    PRE:  aucune</a:t>
-            </a:r>
-            <a:endParaRPr lang="en-US" sz="1100" dirty="0"/>
+              <a:t>OPERATION pop() → E</a:t>
+            </a:r>
+            <a:endParaRPr lang="en-US" sz="1000" dirty="0"/>
           </a:p>
           <a:p>
             <a:pPr indent="0" marL="0">
               <a:buNone/>
             </a:pPr>
             <a:r>
-              <a:rPr lang="en-US" sz="1100" dirty="0">
-                <a:solidFill>
-                  <a:srgbClr val="E2E8F0"/>
+              <a:rPr lang="en-US" sz="1000" dirty="0">
+                <a:solidFill>
+                  <a:srgbClr val="A5F3FC"/>
                 </a:solidFill>
                 <a:latin typeface="Consolas" pitchFamily="34" charset="0"/>
                 <a:ea typeface="Consolas" pitchFamily="34" charset="-122"/>
                 <a:cs typeface="Consolas" pitchFamily="34" charset="-120"/>
               </a:rPr>
-              <a:t>    POST: e est au sommet, size() = old_size + 1</a:t>
-            </a:r>
-            <a:endParaRPr lang="en-US" sz="1100" dirty="0"/>
+              <a:t>  PRE: isEmpty() == false</a:t>
+            </a:r>
+            <a:endParaRPr lang="en-US" sz="1000" dirty="0"/>
           </a:p>
           <a:p>
             <a:pPr indent="0" marL="0">
               <a:buNone/>
             </a:pPr>
-            <a:endParaRPr lang="en-US" sz="1100" dirty="0"/>
-          </a:p>
-          <a:p>
-            <a:pPr indent="0" marL="0">
-              <a:buNone/>
-            </a:pPr>
-            <a:r>
-              <a:rPr lang="en-US" sz="1100" dirty="0">
-                <a:solidFill>
-                  <a:srgbClr val="E2E8F0"/>
+            <a:r>
+              <a:rPr lang="en-US" sz="1000" dirty="0">
+                <a:solidFill>
+                  <a:srgbClr val="A5F3FC"/>
                 </a:solidFill>
                 <a:latin typeface="Consolas" pitchFamily="34" charset="0"/>
                 <a:ea typeface="Consolas" pitchFamily="34" charset="-122"/>
                 <a:cs typeface="Consolas" pitchFamily="34" charset="-120"/>
               </a:rPr>
-              <a:t>  OPERATION pop() -&gt; E</a:t>
-            </a:r>
-            <a:endParaRPr lang="en-US" sz="1100" dirty="0"/>
+              <a:t>  POST: sommet retiré, size -= 1</a:t>
+            </a:r>
+            <a:endParaRPr lang="en-US" sz="1000" dirty="0"/>
           </a:p>
           <a:p>
             <a:pPr indent="0" marL="0">
               <a:buNone/>
             </a:pPr>
-            <a:r>
-              <a:rPr lang="en-US" sz="1100" dirty="0">
-                <a:solidFill>
-                  <a:srgbClr val="E2E8F0"/>
+            <a:endParaRPr lang="en-US" sz="1000" dirty="0"/>
+          </a:p>
+          <a:p>
+            <a:pPr indent="0" marL="0">
+              <a:buNone/>
+            </a:pPr>
+            <a:r>
+              <a:rPr lang="en-US" sz="1000" dirty="0">
+                <a:solidFill>
+                  <a:srgbClr val="A5F3FC"/>
                 </a:solidFill>
                 <a:latin typeface="Consolas" pitchFamily="34" charset="0"/>
                 <a:ea typeface="Consolas" pitchFamily="34" charset="-122"/>
                 <a:cs typeface="Consolas" pitchFamily="34" charset="-120"/>
               </a:rPr>
-              <a:t>    PRE:  isEmpty() == false</a:t>
-            </a:r>
-            <a:endParaRPr lang="en-US" sz="1100" dirty="0"/>
-          </a:p>
-          <a:p>
-            <a:pPr indent="0" marL="0">
-              <a:buNone/>
-            </a:pPr>
-            <a:r>
-              <a:rPr lang="en-US" sz="1100" dirty="0">
-                <a:solidFill>
-                  <a:srgbClr val="E2E8F0"/>
-                </a:solidFill>
-                <a:latin typeface="Consolas" pitchFamily="34" charset="0"/>
-                <a:ea typeface="Consolas" pitchFamily="34" charset="-122"/>
-                <a:cs typeface="Consolas" pitchFamily="34" charset="-120"/>
-              </a:rPr>
-              <a:t>    POST: retourne et retire le sommet, size() = old_size - 1</a:t>
-            </a:r>
-            <a:endParaRPr lang="en-US" sz="1100" dirty="0"/>
-          </a:p>
-          <a:p>
-            <a:pPr indent="0" marL="0">
-              <a:buNone/>
-            </a:pPr>
-            <a:endParaRPr lang="en-US" sz="1100" dirty="0"/>
-          </a:p>
-          <a:p>
-            <a:pPr indent="0" marL="0">
-              <a:buNone/>
-            </a:pPr>
-            <a:r>
-              <a:rPr lang="en-US" sz="1100" dirty="0">
-                <a:solidFill>
-                  <a:srgbClr val="E2E8F0"/>
-                </a:solidFill>
-                <a:latin typeface="Consolas" pitchFamily="34" charset="0"/>
-                <a:ea typeface="Consolas" pitchFamily="34" charset="-122"/>
-                <a:cs typeface="Consolas" pitchFamily="34" charset="-120"/>
-              </a:rPr>
-              <a:t>  OPERATION peek() -&gt; E</a:t>
-            </a:r>
-            <a:endParaRPr lang="en-US" sz="1100" dirty="0"/>
-          </a:p>
-          <a:p>
-            <a:pPr indent="0" marL="0">
-              <a:buNone/>
-            </a:pPr>
-            <a:r>
-              <a:rPr lang="en-US" sz="1100" dirty="0">
-                <a:solidFill>
-                  <a:srgbClr val="E2E8F0"/>
-                </a:solidFill>
-                <a:latin typeface="Consolas" pitchFamily="34" charset="0"/>
-                <a:ea typeface="Consolas" pitchFamily="34" charset="-122"/>
-                <a:cs typeface="Consolas" pitchFamily="34" charset="-120"/>
-              </a:rPr>
-              <a:t>    PRE:  isEmpty() == false</a:t>
-            </a:r>
-            <a:endParaRPr lang="en-US" sz="1100" dirty="0"/>
-          </a:p>
-          <a:p>
-            <a:pPr indent="0" marL="0">
-              <a:buNone/>
-            </a:pPr>
-            <a:r>
-              <a:rPr lang="en-US" sz="1100" dirty="0">
-                <a:solidFill>
-                  <a:srgbClr val="E2E8F0"/>
-                </a:solidFill>
-                <a:latin typeface="Consolas" pitchFamily="34" charset="0"/>
-                <a:ea typeface="Consolas" pitchFamily="34" charset="-122"/>
-                <a:cs typeface="Consolas" pitchFamily="34" charset="-120"/>
-              </a:rPr>
-              <a:t>    POST: retourne le sommet SANS le retirer, size() inchangé</a:t>
-            </a:r>
-            <a:endParaRPr lang="en-US" sz="1100" dirty="0"/>
-          </a:p>
-          <a:p>
-            <a:pPr indent="0" marL="0">
-              <a:buNone/>
-            </a:pPr>
-            <a:endParaRPr lang="en-US" sz="1100" dirty="0"/>
-          </a:p>
-          <a:p>
-            <a:pPr indent="0" marL="0">
-              <a:buNone/>
-            </a:pPr>
-            <a:r>
-              <a:rPr lang="en-US" sz="1100" dirty="0">
-                <a:solidFill>
-                  <a:srgbClr val="E2E8F0"/>
-                </a:solidFill>
-                <a:latin typeface="Consolas" pitchFamily="34" charset="0"/>
-                <a:ea typeface="Consolas" pitchFamily="34" charset="-122"/>
-                <a:cs typeface="Consolas" pitchFamily="34" charset="-120"/>
-              </a:rPr>
-              <a:t>  OPERATION isEmpty() -&gt; boolean</a:t>
-            </a:r>
-            <a:endParaRPr lang="en-US" sz="1100" dirty="0"/>
-          </a:p>
-          <a:p>
-            <a:pPr indent="0" marL="0">
-              <a:buNone/>
-            </a:pPr>
-            <a:r>
-              <a:rPr lang="en-US" sz="1100" dirty="0">
-                <a:solidFill>
-                  <a:srgbClr val="E2E8F0"/>
-                </a:solidFill>
-                <a:latin typeface="Consolas" pitchFamily="34" charset="0"/>
-                <a:ea typeface="Consolas" pitchFamily="34" charset="-122"/>
-                <a:cs typeface="Consolas" pitchFamily="34" charset="-120"/>
-              </a:rPr>
-              <a:t>    PRE:  aucune</a:t>
-            </a:r>
-            <a:endParaRPr lang="en-US" sz="1100" dirty="0"/>
-          </a:p>
-          <a:p>
-            <a:pPr indent="0" marL="0">
-              <a:buNone/>
-            </a:pPr>
-            <a:r>
-              <a:rPr lang="en-US" sz="1100" dirty="0">
-                <a:solidFill>
-                  <a:srgbClr val="E2E8F0"/>
-                </a:solidFill>
-                <a:latin typeface="Consolas" pitchFamily="34" charset="0"/>
-                <a:ea typeface="Consolas" pitchFamily="34" charset="-122"/>
-                <a:cs typeface="Consolas" pitchFamily="34" charset="-120"/>
-              </a:rPr>
-              <a:t>    POST: retourne true si size() == 0</a:t>
-            </a:r>
-            <a:endParaRPr lang="en-US" sz="1100" dirty="0"/>
-          </a:p>
-          <a:p>
-            <a:pPr indent="0" marL="0">
-              <a:buNone/>
-            </a:pPr>
-            <a:endParaRPr lang="en-US" sz="1100" dirty="0"/>
-          </a:p>
-          <a:p>
-            <a:pPr indent="0" marL="0">
-              <a:buNone/>
-            </a:pPr>
-            <a:r>
-              <a:rPr lang="en-US" sz="1100" dirty="0">
-                <a:solidFill>
-                  <a:srgbClr val="E2E8F0"/>
-                </a:solidFill>
-                <a:latin typeface="Consolas" pitchFamily="34" charset="0"/>
-                <a:ea typeface="Consolas" pitchFamily="34" charset="-122"/>
-                <a:cs typeface="Consolas" pitchFamily="34" charset="-120"/>
-              </a:rPr>
-              <a:t>  OPERATION size() -&gt; int</a:t>
-            </a:r>
-            <a:endParaRPr lang="en-US" sz="1100" dirty="0"/>
-          </a:p>
-          <a:p>
-            <a:pPr indent="0" marL="0">
-              <a:buNone/>
-            </a:pPr>
-            <a:r>
-              <a:rPr lang="en-US" sz="1100" dirty="0">
-                <a:solidFill>
-                  <a:srgbClr val="E2E8F0"/>
-                </a:solidFill>
-                <a:latin typeface="Consolas" pitchFamily="34" charset="0"/>
-                <a:ea typeface="Consolas" pitchFamily="34" charset="-122"/>
-                <a:cs typeface="Consolas" pitchFamily="34" charset="-120"/>
-              </a:rPr>
-              <a:t>    PRE:  aucune</a:t>
-            </a:r>
-            <a:endParaRPr lang="en-US" sz="1100" dirty="0"/>
-          </a:p>
-          <a:p>
-            <a:pPr indent="0" marL="0">
-              <a:buNone/>
-            </a:pPr>
-            <a:r>
-              <a:rPr lang="en-US" sz="1100" dirty="0">
-                <a:solidFill>
-                  <a:srgbClr val="E2E8F0"/>
-                </a:solidFill>
-                <a:latin typeface="Consolas" pitchFamily="34" charset="0"/>
-                <a:ea typeface="Consolas" pitchFamily="34" charset="-122"/>
-                <a:cs typeface="Consolas" pitchFamily="34" charset="-120"/>
-              </a:rPr>
-              <a:t>    POST: retourne le nombre d'éléments</a:t>
-            </a:r>
-            <a:endParaRPr lang="en-US" sz="1100" dirty="0"/>
-          </a:p>
-          <a:p>
-            <a:pPr indent="0" marL="0">
-              <a:buNone/>
-            </a:pPr>
-            <a:endParaRPr lang="en-US" sz="1100" dirty="0"/>
-          </a:p>
-          <a:p>
-            <a:pPr indent="0" marL="0">
-              <a:buNone/>
-            </a:pPr>
-            <a:r>
-              <a:rPr lang="en-US" sz="1100" dirty="0">
-                <a:solidFill>
-                  <a:srgbClr val="E2E8F0"/>
-                </a:solidFill>
-                <a:latin typeface="Consolas" pitchFamily="34" charset="0"/>
-                <a:ea typeface="Consolas" pitchFamily="34" charset="-122"/>
-                <a:cs typeface="Consolas" pitchFamily="34" charset="-120"/>
-              </a:rPr>
-              <a:t>INVARIANTS:</a:t>
-            </a:r>
-            <a:endParaRPr lang="en-US" sz="1100" dirty="0"/>
-          </a:p>
-          <a:p>
-            <a:pPr indent="0" marL="0">
-              <a:buNone/>
-            </a:pPr>
-            <a:r>
-              <a:rPr lang="en-US" sz="1100" dirty="0">
-                <a:solidFill>
-                  <a:srgbClr val="E2E8F0"/>
-                </a:solidFill>
-                <a:latin typeface="Consolas" pitchFamily="34" charset="0"/>
-                <a:ea typeface="Consolas" pitchFamily="34" charset="-122"/>
-                <a:cs typeface="Consolas" pitchFamily="34" charset="-120"/>
-              </a:rPr>
-              <a:t>  size() &gt;= 0</a:t>
-            </a:r>
-            <a:endParaRPr lang="en-US" sz="1100" dirty="0"/>
-          </a:p>
-          <a:p>
-            <a:pPr indent="0" marL="0">
-              <a:buNone/>
-            </a:pPr>
-            <a:r>
-              <a:rPr lang="en-US" sz="1100" dirty="0">
-                <a:solidFill>
-                  <a:srgbClr val="E2E8F0"/>
-                </a:solidFill>
-                <a:latin typeface="Consolas" pitchFamily="34" charset="0"/>
-                <a:ea typeface="Consolas" pitchFamily="34" charset="-122"/>
-                <a:cs typeface="Consolas" pitchFamily="34" charset="-120"/>
-              </a:rPr>
-              <a:t>  pop(push(S, e)) == &lt;e, S&gt;  (push puis pop = identité)</a:t>
-            </a:r>
-            <a:endParaRPr lang="en-US" sz="1100" dirty="0"/>
-          </a:p>
-          <a:p>
-            <a:pPr indent="0" marL="0">
-              <a:buNone/>
-            </a:pPr>
-            <a:r>
-              <a:rPr lang="en-US" sz="1100" dirty="0">
-                <a:solidFill>
-                  <a:srgbClr val="E2E8F0"/>
-                </a:solidFill>
-                <a:latin typeface="Consolas" pitchFamily="34" charset="0"/>
-                <a:ea typeface="Consolas" pitchFamily="34" charset="-122"/>
-                <a:cs typeface="Consolas" pitchFamily="34" charset="-120"/>
-              </a:rPr>
-              <a:t>  peek() après push(e) retourne e</a:t>
-            </a:r>
-            <a:endParaRPr lang="en-US" sz="1100" dirty="0"/>
+              <a:t>INVARIANT: size() &gt;= 0</a:t>
+            </a:r>
+            <a:endParaRPr lang="en-US" sz="1000" dirty="0"/>
           </a:p>
         </p:txBody>
       </p:sp>
@@ -2500,7 +2566,7 @@
     <p:bg>
       <p:bgPr>
         <a:solidFill>
-          <a:srgbClr val="F8FAFC"/>
+          <a:srgbClr val="0B2027"/>
         </a:solidFill>
       </p:bgPr>
     </p:bg>
@@ -2527,13 +2593,13 @@
         <p:spPr>
           <a:xfrm>
             <a:off x="0" y="0"/>
-            <a:ext cx="109728" cy="5143500"/>
+            <a:ext cx="9144000" cy="54864"/>
           </a:xfrm>
           <a:prstGeom prst="rect">
             <a:avLst/>
           </a:prstGeom>
           <a:solidFill>
-            <a:srgbClr val="028090"/>
+            <a:srgbClr val="0891B2"/>
           </a:solidFill>
           <a:ln/>
         </p:spPr>
@@ -2546,7 +2612,7 @@
         </p:nvSpPr>
         <p:spPr>
           <a:xfrm>
-            <a:off x="457200" y="274320"/>
+            <a:off x="548640" y="274320"/>
             <a:ext cx="8229600" cy="548640"/>
           </a:xfrm>
           <a:prstGeom prst="rect">
@@ -2563,17 +2629,17 @@
               <a:buNone/>
             </a:pPr>
             <a:r>
-              <a:rPr lang="en-US" sz="2600" b="1" dirty="0">
-                <a:solidFill>
-                  <a:srgbClr val="1B2A4A"/>
-                </a:solidFill>
-                <a:latin typeface="Trebuchet MS" pitchFamily="34" charset="0"/>
-                <a:ea typeface="Trebuchet MS" pitchFamily="34" charset="-122"/>
-                <a:cs typeface="Trebuchet MS" pitchFamily="34" charset="-120"/>
-              </a:rPr>
-              <a:t>Les axiomes d'un Stack</a:t>
-            </a:r>
-            <a:endParaRPr lang="en-US" sz="2600" dirty="0"/>
+              <a:rPr lang="en-US" sz="2400" b="1" dirty="0">
+                <a:solidFill>
+                  <a:srgbClr val="FFFFFF"/>
+                </a:solidFill>
+                <a:latin typeface="Calibri" pitchFamily="34" charset="0"/>
+                <a:ea typeface="Calibri" pitchFamily="34" charset="-122"/>
+                <a:cs typeface="Calibri" pitchFamily="34" charset="-120"/>
+              </a:rPr>
+              <a:t>Langages de spécification non exécutables</a:t>
+            </a:r>
+            <a:endParaRPr lang="en-US" sz="2400" dirty="0"/>
           </a:p>
         </p:txBody>
       </p:sp>
@@ -2585,8 +2651,8 @@
         </p:nvSpPr>
         <p:spPr>
           <a:xfrm>
-            <a:off x="640080" y="1005840"/>
-            <a:ext cx="7772400" cy="457200"/>
+            <a:off x="548640" y="1005840"/>
+            <a:ext cx="8046720" cy="3657600"/>
           </a:xfrm>
           <a:prstGeom prst="rect">
             <a:avLst/>
@@ -2595,223 +2661,110 @@
           <a:ln/>
         </p:spPr>
         <p:txBody>
-          <a:bodyPr wrap="square" rtlCol="0" anchor="ctr"/>
+          <a:bodyPr wrap="square" rtlCol="0" anchor="t"/>
           <a:lstStyle/>
           <a:p>
             <a:pPr marL="342900" indent="-342900">
+              <a:lnSpc>
+                <a:spcPct val="130000"/>
+              </a:lnSpc>
               <a:buSzPct val="100000"/>
               <a:buChar char="•"/>
             </a:pPr>
             <a:r>
               <a:rPr lang="en-US" sz="1400" dirty="0">
                 <a:solidFill>
-                  <a:srgbClr val="334155"/>
-                </a:solidFill>
-                <a:latin typeface="Calibri" pitchFamily="34" charset="0"/>
-                <a:ea typeface="Calibri" pitchFamily="34" charset="-122"/>
-                <a:cs typeface="Calibri" pitchFamily="34" charset="-120"/>
-              </a:rPr>
-              <a:t>AXIOME 1 : new Stack().isEmpty() == true (un stack neuf est vide)</a:t>
+                  <a:srgbClr val="E2E8F0"/>
+                </a:solidFill>
+                <a:latin typeface="Calibri" pitchFamily="34" charset="0"/>
+                <a:ea typeface="Calibri" pitchFamily="34" charset="-122"/>
+                <a:cs typeface="Calibri" pitchFamily="34" charset="-120"/>
+              </a:rPr>
+              <a:t>Outils pour décrire formellement un système SANS générer de code</a:t>
             </a:r>
             <a:endParaRPr lang="en-US" sz="1400" dirty="0"/>
           </a:p>
-        </p:txBody>
-      </p:sp>
-      <p:sp>
-        <p:nvSpPr>
-          <p:cNvPr id="5" name="Text 3"/>
-          <p:cNvSpPr/>
-          <p:nvPr/>
-        </p:nvSpPr>
-        <p:spPr>
-          <a:xfrm>
-            <a:off x="640080" y="1554480"/>
-            <a:ext cx="7772400" cy="457200"/>
-          </a:xfrm>
-          <a:prstGeom prst="rect">
-            <a:avLst/>
-          </a:prstGeom>
-          <a:noFill/>
-          <a:ln/>
-        </p:spPr>
-        <p:txBody>
-          <a:bodyPr wrap="square" rtlCol="0" anchor="ctr"/>
-          <a:lstStyle/>
           <a:p>
             <a:pPr marL="342900" indent="-342900">
+              <a:lnSpc>
+                <a:spcPct val="130000"/>
+              </a:lnSpc>
               <a:buSzPct val="100000"/>
               <a:buChar char="•"/>
             </a:pPr>
             <a:r>
               <a:rPr lang="en-US" sz="1400" dirty="0">
                 <a:solidFill>
-                  <a:srgbClr val="334155"/>
-                </a:solidFill>
-                <a:latin typeface="Calibri" pitchFamily="34" charset="0"/>
-                <a:ea typeface="Calibri" pitchFamily="34" charset="-122"/>
-                <a:cs typeface="Calibri" pitchFamily="34" charset="-120"/>
-              </a:rPr>
-              <a:t>AXIOME 2 : push(S, e).isEmpty() == false (après push, jamais vide)</a:t>
+                  <a:srgbClr val="E2E8F0"/>
+                </a:solidFill>
+                <a:latin typeface="Calibri" pitchFamily="34" charset="0"/>
+                <a:ea typeface="Calibri" pitchFamily="34" charset="-122"/>
+                <a:cs typeface="Calibri" pitchFamily="34" charset="-120"/>
+              </a:rPr>
+              <a:t>Réduisent les erreurs de conception</a:t>
             </a:r>
             <a:endParaRPr lang="en-US" sz="1400" dirty="0"/>
           </a:p>
-        </p:txBody>
-      </p:sp>
-      <p:sp>
-        <p:nvSpPr>
-          <p:cNvPr id="6" name="Text 4"/>
-          <p:cNvSpPr/>
-          <p:nvPr/>
-        </p:nvSpPr>
-        <p:spPr>
-          <a:xfrm>
-            <a:off x="640080" y="2103120"/>
-            <a:ext cx="7772400" cy="457200"/>
-          </a:xfrm>
-          <a:prstGeom prst="rect">
-            <a:avLst/>
-          </a:prstGeom>
-          <a:noFill/>
-          <a:ln/>
-        </p:spPr>
-        <p:txBody>
-          <a:bodyPr wrap="square" rtlCol="0" anchor="ctr"/>
-          <a:lstStyle/>
           <a:p>
             <a:pPr marL="342900" indent="-342900">
+              <a:lnSpc>
+                <a:spcPct val="130000"/>
+              </a:lnSpc>
               <a:buSzPct val="100000"/>
               <a:buChar char="•"/>
             </a:pPr>
             <a:r>
               <a:rPr lang="en-US" sz="1400" dirty="0">
                 <a:solidFill>
-                  <a:srgbClr val="334155"/>
-                </a:solidFill>
-                <a:latin typeface="Calibri" pitchFamily="34" charset="0"/>
-                <a:ea typeface="Calibri" pitchFamily="34" charset="-122"/>
-                <a:cs typeface="Calibri" pitchFamily="34" charset="-120"/>
-              </a:rPr>
-              <a:t>AXIOME 3 : push(S, e).peek() == e (peek retourne le dernier pushé)</a:t>
+                  <a:srgbClr val="E2E8F0"/>
+                </a:solidFill>
+                <a:latin typeface="Calibri" pitchFamily="34" charset="0"/>
+                <a:ea typeface="Calibri" pitchFamily="34" charset="-122"/>
+                <a:cs typeface="Calibri" pitchFamily="34" charset="-120"/>
+              </a:rPr>
+              <a:t>Facilitent la vérification et la communication</a:t>
             </a:r>
             <a:endParaRPr lang="en-US" sz="1400" dirty="0"/>
           </a:p>
-        </p:txBody>
-      </p:sp>
-      <p:sp>
-        <p:nvSpPr>
-          <p:cNvPr id="7" name="Text 5"/>
-          <p:cNvSpPr/>
-          <p:nvPr/>
-        </p:nvSpPr>
-        <p:spPr>
-          <a:xfrm>
-            <a:off x="640080" y="2651760"/>
-            <a:ext cx="7772400" cy="457200"/>
-          </a:xfrm>
-          <a:prstGeom prst="rect">
-            <a:avLst/>
-          </a:prstGeom>
-          <a:noFill/>
-          <a:ln/>
-        </p:spPr>
-        <p:txBody>
-          <a:bodyPr wrap="square" rtlCol="0" anchor="ctr"/>
-          <a:lstStyle/>
           <a:p>
             <a:pPr marL="342900" indent="-342900">
+              <a:lnSpc>
+                <a:spcPct val="130000"/>
+              </a:lnSpc>
               <a:buSzPct val="100000"/>
               <a:buChar char="•"/>
             </a:pPr>
             <a:r>
               <a:rPr lang="en-US" sz="1400" dirty="0">
                 <a:solidFill>
-                  <a:srgbClr val="334155"/>
-                </a:solidFill>
-                <a:latin typeface="Calibri" pitchFamily="34" charset="0"/>
-                <a:ea typeface="Calibri" pitchFamily="34" charset="-122"/>
-                <a:cs typeface="Calibri" pitchFamily="34" charset="-120"/>
-              </a:rPr>
-              <a:t>AXIOME 4 : push(S, e).pop() == S (pop après push = état original)</a:t>
+                  <a:srgbClr val="E2E8F0"/>
+                </a:solidFill>
+                <a:latin typeface="Calibri" pitchFamily="34" charset="0"/>
+                <a:ea typeface="Calibri" pitchFamily="34" charset="-122"/>
+                <a:cs typeface="Calibri" pitchFamily="34" charset="-120"/>
+              </a:rPr>
+              <a:t>3 exemples majeurs : VDM, SDL, ASN.1</a:t>
             </a:r>
             <a:endParaRPr lang="en-US" sz="1400" dirty="0"/>
           </a:p>
-        </p:txBody>
-      </p:sp>
-      <p:sp>
-        <p:nvSpPr>
-          <p:cNvPr id="8" name="Text 6"/>
-          <p:cNvSpPr/>
-          <p:nvPr/>
-        </p:nvSpPr>
-        <p:spPr>
-          <a:xfrm>
-            <a:off x="640080" y="3200400"/>
-            <a:ext cx="7772400" cy="457200"/>
-          </a:xfrm>
-          <a:prstGeom prst="rect">
-            <a:avLst/>
-          </a:prstGeom>
-          <a:noFill/>
-          <a:ln/>
-        </p:spPr>
-        <p:txBody>
-          <a:bodyPr wrap="square" rtlCol="0" anchor="ctr"/>
-          <a:lstStyle/>
           <a:p>
             <a:pPr marL="342900" indent="-342900">
+              <a:lnSpc>
+                <a:spcPct val="130000"/>
+              </a:lnSpc>
               <a:buSzPct val="100000"/>
               <a:buChar char="•"/>
             </a:pPr>
             <a:r>
               <a:rPr lang="en-US" sz="1400" dirty="0">
                 <a:solidFill>
-                  <a:srgbClr val="334155"/>
-                </a:solidFill>
-                <a:latin typeface="Calibri" pitchFamily="34" charset="0"/>
-                <a:ea typeface="Calibri" pitchFamily="34" charset="-122"/>
-                <a:cs typeface="Calibri" pitchFamily="34" charset="-120"/>
-              </a:rPr>
-              <a:t>AXIOME 5 : push(S, e).size() == S.size() + 1</a:t>
-            </a:r>
-            <a:endParaRPr lang="en-US" sz="1400" dirty="0"/>
-          </a:p>
-        </p:txBody>
-      </p:sp>
-      <p:sp>
-        <p:nvSpPr>
-          <p:cNvPr id="9" name="Text 7"/>
-          <p:cNvSpPr/>
-          <p:nvPr/>
-        </p:nvSpPr>
-        <p:spPr>
-          <a:xfrm>
-            <a:off x="640080" y="3749040"/>
-            <a:ext cx="7772400" cy="457200"/>
-          </a:xfrm>
-          <a:prstGeom prst="rect">
-            <a:avLst/>
-          </a:prstGeom>
-          <a:noFill/>
-          <a:ln/>
-        </p:spPr>
-        <p:txBody>
-          <a:bodyPr wrap="square" rtlCol="0" anchor="ctr"/>
-          <a:lstStyle/>
-          <a:p>
-            <a:pPr marL="342900" indent="-342900">
-              <a:buSzPct val="100000"/>
-              <a:buChar char="•"/>
-            </a:pPr>
-            <a:r>
-              <a:rPr lang="en-US" sz="1400" dirty="0">
-                <a:solidFill>
-                  <a:srgbClr val="334155"/>
-                </a:solidFill>
-                <a:latin typeface="Calibri" pitchFamily="34" charset="0"/>
-                <a:ea typeface="Calibri" pitchFamily="34" charset="-122"/>
-                <a:cs typeface="Calibri" pitchFamily="34" charset="-120"/>
-              </a:rPr>
-              <a:t>Ces axiomes DÉFINISSENT le comportement exact du Stack sans implémentation !</a:t>
+                  <a:srgbClr val="E2E8F0"/>
+                </a:solidFill>
+                <a:latin typeface="Calibri" pitchFamily="34" charset="0"/>
+                <a:ea typeface="Calibri" pitchFamily="34" charset="-122"/>
+                <a:cs typeface="Calibri" pitchFamily="34" charset="-120"/>
+              </a:rPr>
+              <a:t>Précision : vérifications automatiques possibles</a:t>
             </a:r>
             <a:endParaRPr lang="en-US" sz="1400" dirty="0"/>
           </a:p>
@@ -2831,7 +2784,7 @@
     <p:bg>
       <p:bgPr>
         <a:solidFill>
-          <a:srgbClr val="F8FAFC"/>
+          <a:srgbClr val="0B2027"/>
         </a:solidFill>
       </p:bgPr>
     </p:bg>
@@ -2858,13 +2811,13 @@
         <p:spPr>
           <a:xfrm>
             <a:off x="0" y="0"/>
-            <a:ext cx="109728" cy="5143500"/>
+            <a:ext cx="9144000" cy="54864"/>
           </a:xfrm>
           <a:prstGeom prst="rect">
             <a:avLst/>
           </a:prstGeom>
           <a:solidFill>
-            <a:srgbClr val="028090"/>
+            <a:srgbClr val="0891B2"/>
           </a:solidFill>
           <a:ln/>
         </p:spPr>
@@ -2877,7 +2830,7 @@
         </p:nvSpPr>
         <p:spPr>
           <a:xfrm>
-            <a:off x="457200" y="274320"/>
+            <a:off x="548640" y="274320"/>
             <a:ext cx="8229600" cy="548640"/>
           </a:xfrm>
           <a:prstGeom prst="rect">
@@ -2894,17 +2847,17 @@
               <a:buNone/>
             </a:pPr>
             <a:r>
-              <a:rPr lang="en-US" sz="2600" b="1" dirty="0">
-                <a:solidFill>
-                  <a:srgbClr val="1B2A4A"/>
-                </a:solidFill>
-                <a:latin typeface="Trebuchet MS" pitchFamily="34" charset="0"/>
-                <a:ea typeface="Trebuchet MS" pitchFamily="34" charset="-122"/>
-                <a:cs typeface="Trebuchet MS" pitchFamily="34" charset="-120"/>
-              </a:rPr>
-              <a:t>De la notation impérative au code Java</a:t>
-            </a:r>
-            <a:endParaRPr lang="en-US" sz="2600" dirty="0"/>
+              <a:rPr lang="en-US" sz="2400" b="1" dirty="0">
+                <a:solidFill>
+                  <a:srgbClr val="FFFFFF"/>
+                </a:solidFill>
+                <a:latin typeface="Calibri" pitchFamily="34" charset="0"/>
+                <a:ea typeface="Calibri" pitchFamily="34" charset="-122"/>
+                <a:cs typeface="Calibri" pitchFamily="34" charset="-120"/>
+              </a:rPr>
+              <a:t>VDM (Vienna Development Method)</a:t>
+            </a:r>
+            <a:endParaRPr lang="en-US" sz="2400" dirty="0"/>
           </a:p>
         </p:txBody>
       </p:sp>
@@ -2916,8 +2869,8 @@
         </p:nvSpPr>
         <p:spPr>
           <a:xfrm>
-            <a:off x="640080" y="1005840"/>
-            <a:ext cx="7772400" cy="457200"/>
+            <a:off x="548640" y="1005840"/>
+            <a:ext cx="3840480" cy="3200400"/>
           </a:xfrm>
           <a:prstGeom prst="rect">
             <a:avLst/>
@@ -2926,7 +2879,7 @@
           <a:ln/>
         </p:spPr>
         <p:txBody>
-          <a:bodyPr wrap="square" rtlCol="0" anchor="ctr"/>
+          <a:bodyPr wrap="square" rtlCol="0" anchor="t"/>
           <a:lstStyle/>
           <a:p>
             <a:pPr marL="342900" indent="-342900">
@@ -2934,190 +2887,124 @@
               <a:buChar char="•"/>
             </a:pPr>
             <a:r>
-              <a:rPr lang="en-US" sz="1400" dirty="0">
-                <a:solidFill>
-                  <a:srgbClr val="334155"/>
-                </a:solidFill>
-                <a:latin typeface="Calibri" pitchFamily="34" charset="0"/>
-                <a:ea typeface="Calibri" pitchFamily="34" charset="-122"/>
-                <a:cs typeface="Calibri" pitchFamily="34" charset="-120"/>
-              </a:rPr>
-              <a:t>ADT Stack&lt;E&gt; → interface Stack&lt;E&gt; { ... } en Java</a:t>
-            </a:r>
-            <a:endParaRPr lang="en-US" sz="1400" dirty="0"/>
-          </a:p>
-        </p:txBody>
-      </p:sp>
-      <p:sp>
-        <p:nvSpPr>
-          <p:cNvPr id="5" name="Text 3"/>
-          <p:cNvSpPr/>
-          <p:nvPr/>
-        </p:nvSpPr>
-        <p:spPr>
-          <a:xfrm>
-            <a:off x="640080" y="1554480"/>
-            <a:ext cx="7772400" cy="457200"/>
-          </a:xfrm>
-          <a:prstGeom prst="rect">
-            <a:avLst/>
-          </a:prstGeom>
-          <a:noFill/>
-          <a:ln/>
-        </p:spPr>
-        <p:txBody>
-          <a:bodyPr wrap="square" rtlCol="0" anchor="ctr"/>
-          <a:lstStyle/>
+              <a:rPr lang="en-US" sz="1300" dirty="0">
+                <a:solidFill>
+                  <a:srgbClr val="E2E8F0"/>
+                </a:solidFill>
+                <a:latin typeface="Calibri" pitchFamily="34" charset="0"/>
+                <a:ea typeface="Calibri" pitchFamily="34" charset="-122"/>
+                <a:cs typeface="Calibri" pitchFamily="34" charset="-120"/>
+              </a:rPr>
+              <a:t>Méthode formelle basée sur la logique mathématique</a:t>
+            </a:r>
+            <a:endParaRPr lang="en-US" sz="1300" dirty="0"/>
+          </a:p>
           <a:p>
             <a:pPr marL="342900" indent="-342900">
               <a:buSzPct val="100000"/>
               <a:buChar char="•"/>
             </a:pPr>
             <a:r>
-              <a:rPr lang="en-US" sz="1400" dirty="0">
-                <a:solidFill>
-                  <a:srgbClr val="334155"/>
-                </a:solidFill>
-                <a:latin typeface="Calibri" pitchFamily="34" charset="0"/>
-                <a:ea typeface="Calibri" pitchFamily="34" charset="-122"/>
-                <a:cs typeface="Calibri" pitchFamily="34" charset="-120"/>
-              </a:rPr>
-              <a:t>OPERATION push(e: E) → void push(E e);</a:t>
-            </a:r>
-            <a:endParaRPr lang="en-US" sz="1400" dirty="0"/>
-          </a:p>
-        </p:txBody>
-      </p:sp>
-      <p:sp>
-        <p:nvSpPr>
-          <p:cNvPr id="6" name="Text 4"/>
-          <p:cNvSpPr/>
-          <p:nvPr/>
-        </p:nvSpPr>
-        <p:spPr>
-          <a:xfrm>
-            <a:off x="640080" y="2103120"/>
-            <a:ext cx="7772400" cy="457200"/>
-          </a:xfrm>
-          <a:prstGeom prst="rect">
-            <a:avLst/>
-          </a:prstGeom>
-          <a:noFill/>
-          <a:ln/>
-        </p:spPr>
-        <p:txBody>
-          <a:bodyPr wrap="square" rtlCol="0" anchor="ctr"/>
-          <a:lstStyle/>
+              <a:rPr lang="en-US" sz="1300" dirty="0">
+                <a:solidFill>
+                  <a:srgbClr val="E2E8F0"/>
+                </a:solidFill>
+                <a:latin typeface="Calibri" pitchFamily="34" charset="0"/>
+                <a:ea typeface="Calibri" pitchFamily="34" charset="-122"/>
+                <a:cs typeface="Calibri" pitchFamily="34" charset="-120"/>
+              </a:rPr>
+              <a:t>Utilise le symbole ≜ (est défini comme)</a:t>
+            </a:r>
+            <a:endParaRPr lang="en-US" sz="1300" dirty="0"/>
+          </a:p>
           <a:p>
             <a:pPr marL="342900" indent="-342900">
               <a:buSzPct val="100000"/>
               <a:buChar char="•"/>
             </a:pPr>
             <a:r>
-              <a:rPr lang="en-US" sz="1400" dirty="0">
-                <a:solidFill>
-                  <a:srgbClr val="334155"/>
-                </a:solidFill>
-                <a:latin typeface="Calibri" pitchFamily="34" charset="0"/>
-                <a:ea typeface="Calibri" pitchFamily="34" charset="-122"/>
-                <a:cs typeface="Calibri" pitchFamily="34" charset="-120"/>
-              </a:rPr>
-              <a:t>PRE: isEmpty() == false → if (isEmpty()) throw new EmptyStackException();</a:t>
-            </a:r>
-            <a:endParaRPr lang="en-US" sz="1400" dirty="0"/>
-          </a:p>
-        </p:txBody>
-      </p:sp>
-      <p:sp>
-        <p:nvSpPr>
-          <p:cNvPr id="7" name="Text 5"/>
-          <p:cNvSpPr/>
-          <p:nvPr/>
-        </p:nvSpPr>
-        <p:spPr>
-          <a:xfrm>
-            <a:off x="640080" y="2651760"/>
-            <a:ext cx="7772400" cy="457200"/>
-          </a:xfrm>
-          <a:prstGeom prst="rect">
-            <a:avLst/>
-          </a:prstGeom>
-          <a:noFill/>
-          <a:ln/>
-        </p:spPr>
-        <p:txBody>
-          <a:bodyPr wrap="square" rtlCol="0" anchor="ctr"/>
-          <a:lstStyle/>
+              <a:rPr lang="en-US" sz="1300" dirty="0">
+                <a:solidFill>
+                  <a:srgbClr val="E2E8F0"/>
+                </a:solidFill>
+                <a:latin typeface="Calibri" pitchFamily="34" charset="0"/>
+                <a:ea typeface="Calibri" pitchFamily="34" charset="-122"/>
+                <a:cs typeface="Calibri" pitchFamily="34" charset="-120"/>
+              </a:rPr>
+              <a:t>Pré-conditions : pre-push(e) ≜ true</a:t>
+            </a:r>
+            <a:endParaRPr lang="en-US" sz="1300" dirty="0"/>
+          </a:p>
           <a:p>
             <a:pPr marL="342900" indent="-342900">
               <a:buSzPct val="100000"/>
               <a:buChar char="•"/>
             </a:pPr>
             <a:r>
-              <a:rPr lang="en-US" sz="1400" dirty="0">
-                <a:solidFill>
-                  <a:srgbClr val="334155"/>
-                </a:solidFill>
-                <a:latin typeface="Calibri" pitchFamily="34" charset="0"/>
-                <a:ea typeface="Calibri" pitchFamily="34" charset="-122"/>
-                <a:cs typeface="Calibri" pitchFamily="34" charset="-120"/>
-              </a:rPr>
-              <a:t>POST: size = old_size + 1 → vérifiable par un test JUnit : assertEquals(oldSize+1, stack.size())</a:t>
-            </a:r>
-            <a:endParaRPr lang="en-US" sz="1400" dirty="0"/>
-          </a:p>
-        </p:txBody>
-      </p:sp>
-      <p:sp>
-        <p:nvSpPr>
-          <p:cNvPr id="8" name="Text 6"/>
-          <p:cNvSpPr/>
-          <p:nvPr/>
-        </p:nvSpPr>
-        <p:spPr>
-          <a:xfrm>
-            <a:off x="640080" y="3200400"/>
-            <a:ext cx="7772400" cy="457200"/>
-          </a:xfrm>
-          <a:prstGeom prst="rect">
-            <a:avLst/>
-          </a:prstGeom>
-          <a:noFill/>
-          <a:ln/>
-        </p:spPr>
-        <p:txBody>
-          <a:bodyPr wrap="square" rtlCol="0" anchor="ctr"/>
-          <a:lstStyle/>
+              <a:rPr lang="en-US" sz="1300" dirty="0">
+                <a:solidFill>
+                  <a:srgbClr val="E2E8F0"/>
+                </a:solidFill>
+                <a:latin typeface="Calibri" pitchFamily="34" charset="0"/>
+                <a:ea typeface="Calibri" pitchFamily="34" charset="-122"/>
+                <a:cs typeface="Calibri" pitchFamily="34" charset="-120"/>
+              </a:rPr>
+              <a:t>Post-conditions : post-pop(s, result) ≜ result = hd(s) ∧ s' = tl(s)</a:t>
+            </a:r>
+            <a:endParaRPr lang="en-US" sz="1300" dirty="0"/>
+          </a:p>
           <a:p>
             <a:pPr marL="342900" indent="-342900">
               <a:buSzPct val="100000"/>
               <a:buChar char="•"/>
             </a:pPr>
             <a:r>
-              <a:rPr lang="en-US" sz="1400" dirty="0">
-                <a:solidFill>
-                  <a:srgbClr val="334155"/>
-                </a:solidFill>
-                <a:latin typeface="Calibri" pitchFamily="34" charset="0"/>
-                <a:ea typeface="Calibri" pitchFamily="34" charset="-122"/>
-                <a:cs typeface="Calibri" pitchFamily="34" charset="-120"/>
-              </a:rPr>
-              <a:t>INVARIANT: size &gt;= 0 → le constructeur initialise size = 0, pop décrémente seulement si &gt; 0</a:t>
-            </a:r>
-            <a:endParaRPr lang="en-US" sz="1400" dirty="0"/>
-          </a:p>
-        </p:txBody>
-      </p:sp>
-      <p:sp>
-        <p:nvSpPr>
-          <p:cNvPr id="9" name="Text 7"/>
-          <p:cNvSpPr/>
-          <p:nvPr/>
-        </p:nvSpPr>
-        <p:spPr>
-          <a:xfrm>
-            <a:off x="640080" y="3749040"/>
-            <a:ext cx="7772400" cy="457200"/>
+              <a:rPr lang="en-US" sz="1300" dirty="0">
+                <a:solidFill>
+                  <a:srgbClr val="E2E8F0"/>
+                </a:solidFill>
+                <a:latin typeface="Calibri" pitchFamily="34" charset="0"/>
+                <a:ea typeface="Calibri" pitchFamily="34" charset="-122"/>
+                <a:cs typeface="Calibri" pitchFamily="34" charset="-120"/>
+              </a:rPr>
+              <a:t>Invariants : inv-Stack(s) ≜ len(s) ≥ 0</a:t>
+            </a:r>
+            <a:endParaRPr lang="en-US" sz="1300" dirty="0"/>
+          </a:p>
+        </p:txBody>
+      </p:sp>
+      <p:sp>
+        <p:nvSpPr>
+          <p:cNvPr id="5" name="Shape 3"/>
+          <p:cNvSpPr/>
+          <p:nvPr/>
+        </p:nvSpPr>
+        <p:spPr>
+          <a:xfrm>
+            <a:off x="4754880" y="1005840"/>
+            <a:ext cx="4023360" cy="3200400"/>
+          </a:xfrm>
+          <a:prstGeom prst="roundRect">
+            <a:avLst>
+              <a:gd name="adj" fmla="val 2857"/>
+            </a:avLst>
+          </a:prstGeom>
+          <a:solidFill>
+            <a:srgbClr val="0D1117"/>
+          </a:solidFill>
+          <a:ln/>
+        </p:spPr>
+      </p:sp>
+      <p:sp>
+        <p:nvSpPr>
+          <p:cNvPr id="6" name="Text 4"/>
+          <p:cNvSpPr/>
+          <p:nvPr/>
+        </p:nvSpPr>
+        <p:spPr>
+          <a:xfrm>
+            <a:off x="4937760" y="1143000"/>
+            <a:ext cx="3657600" cy="2926080"/>
           </a:xfrm>
           <a:prstGeom prst="rect">
             <a:avLst/>
@@ -3126,25 +3013,144 @@
           <a:ln/>
         </p:spPr>
         <p:txBody>
-          <a:bodyPr wrap="square" rtlCol="0" anchor="ctr"/>
-          <a:lstStyle/>
-          <a:p>
-            <a:pPr marL="342900" indent="-342900">
-              <a:buSzPct val="100000"/>
-              <a:buChar char="•"/>
-            </a:pPr>
-            <a:r>
-              <a:rPr lang="en-US" sz="1400" dirty="0">
-                <a:solidFill>
-                  <a:srgbClr val="334155"/>
-                </a:solidFill>
-                <a:latin typeface="Calibri" pitchFamily="34" charset="0"/>
-                <a:ea typeface="Calibri" pitchFamily="34" charset="-122"/>
-                <a:cs typeface="Calibri" pitchFamily="34" charset="-120"/>
-              </a:rPr>
-              <a:t>La notation formelle est le PLAN, le code Java est la CONSTRUCTION</a:t>
-            </a:r>
-            <a:endParaRPr lang="en-US" sz="1400" dirty="0"/>
+          <a:bodyPr wrap="square" rtlCol="0" anchor="t"/>
+          <a:lstStyle/>
+          <a:p>
+            <a:pPr indent="0" marL="0">
+              <a:buNone/>
+            </a:pPr>
+            <a:r>
+              <a:rPr lang="en-US" sz="1000" dirty="0">
+                <a:solidFill>
+                  <a:srgbClr val="A5F3FC"/>
+                </a:solidFill>
+                <a:latin typeface="Consolas" pitchFamily="34" charset="0"/>
+                <a:ea typeface="Consolas" pitchFamily="34" charset="-122"/>
+                <a:cs typeface="Consolas" pitchFamily="34" charset="-120"/>
+              </a:rPr>
+              <a:t>// Notation VDM</a:t>
+            </a:r>
+            <a:endParaRPr lang="en-US" sz="1000" dirty="0"/>
+          </a:p>
+          <a:p>
+            <a:pPr indent="0" marL="0">
+              <a:buNone/>
+            </a:pPr>
+            <a:endParaRPr lang="en-US" sz="1000" dirty="0"/>
+          </a:p>
+          <a:p>
+            <a:pPr indent="0" marL="0">
+              <a:buNone/>
+            </a:pPr>
+            <a:r>
+              <a:rPr lang="en-US" sz="1000" dirty="0">
+                <a:solidFill>
+                  <a:srgbClr val="A5F3FC"/>
+                </a:solidFill>
+                <a:latin typeface="Consolas" pitchFamily="34" charset="0"/>
+                <a:ea typeface="Consolas" pitchFamily="34" charset="-122"/>
+                <a:cs typeface="Consolas" pitchFamily="34" charset="-120"/>
+              </a:rPr>
+              <a:t>pre-push(e) ≜ true</a:t>
+            </a:r>
+            <a:endParaRPr lang="en-US" sz="1000" dirty="0"/>
+          </a:p>
+          <a:p>
+            <a:pPr indent="0" marL="0">
+              <a:buNone/>
+            </a:pPr>
+            <a:endParaRPr lang="en-US" sz="1000" dirty="0"/>
+          </a:p>
+          <a:p>
+            <a:pPr indent="0" marL="0">
+              <a:buNone/>
+            </a:pPr>
+            <a:r>
+              <a:rPr lang="en-US" sz="1000" dirty="0">
+                <a:solidFill>
+                  <a:srgbClr val="A5F3FC"/>
+                </a:solidFill>
+                <a:latin typeface="Consolas" pitchFamily="34" charset="0"/>
+                <a:ea typeface="Consolas" pitchFamily="34" charset="-122"/>
+                <a:cs typeface="Consolas" pitchFamily="34" charset="-120"/>
+              </a:rPr>
+              <a:t>post-pop(s, result) ≜</a:t>
+            </a:r>
+            <a:endParaRPr lang="en-US" sz="1000" dirty="0"/>
+          </a:p>
+          <a:p>
+            <a:pPr indent="0" marL="0">
+              <a:buNone/>
+            </a:pPr>
+            <a:r>
+              <a:rPr lang="en-US" sz="1000" dirty="0">
+                <a:solidFill>
+                  <a:srgbClr val="A5F3FC"/>
+                </a:solidFill>
+                <a:latin typeface="Consolas" pitchFamily="34" charset="0"/>
+                <a:ea typeface="Consolas" pitchFamily="34" charset="-122"/>
+                <a:cs typeface="Consolas" pitchFamily="34" charset="-120"/>
+              </a:rPr>
+              <a:t>  result = hd(s) ∧</a:t>
+            </a:r>
+            <a:endParaRPr lang="en-US" sz="1000" dirty="0"/>
+          </a:p>
+          <a:p>
+            <a:pPr indent="0" marL="0">
+              <a:buNone/>
+            </a:pPr>
+            <a:r>
+              <a:rPr lang="en-US" sz="1000" dirty="0">
+                <a:solidFill>
+                  <a:srgbClr val="A5F3FC"/>
+                </a:solidFill>
+                <a:latin typeface="Consolas" pitchFamily="34" charset="0"/>
+                <a:ea typeface="Consolas" pitchFamily="34" charset="-122"/>
+                <a:cs typeface="Consolas" pitchFamily="34" charset="-120"/>
+              </a:rPr>
+              <a:t>  s' = tl(s)</a:t>
+            </a:r>
+            <a:endParaRPr lang="en-US" sz="1000" dirty="0"/>
+          </a:p>
+          <a:p>
+            <a:pPr indent="0" marL="0">
+              <a:buNone/>
+            </a:pPr>
+            <a:endParaRPr lang="en-US" sz="1000" dirty="0"/>
+          </a:p>
+          <a:p>
+            <a:pPr indent="0" marL="0">
+              <a:buNone/>
+            </a:pPr>
+            <a:r>
+              <a:rPr lang="en-US" sz="1000" dirty="0">
+                <a:solidFill>
+                  <a:srgbClr val="A5F3FC"/>
+                </a:solidFill>
+                <a:latin typeface="Consolas" pitchFamily="34" charset="0"/>
+                <a:ea typeface="Consolas" pitchFamily="34" charset="-122"/>
+                <a:cs typeface="Consolas" pitchFamily="34" charset="-120"/>
+              </a:rPr>
+              <a:t>inv-Stack(s) ≜</a:t>
+            </a:r>
+            <a:endParaRPr lang="en-US" sz="1000" dirty="0"/>
+          </a:p>
+          <a:p>
+            <a:pPr indent="0" marL="0">
+              <a:buNone/>
+            </a:pPr>
+            <a:r>
+              <a:rPr lang="en-US" sz="1000" dirty="0">
+                <a:solidFill>
+                  <a:srgbClr val="A5F3FC"/>
+                </a:solidFill>
+                <a:latin typeface="Consolas" pitchFamily="34" charset="0"/>
+                <a:ea typeface="Consolas" pitchFamily="34" charset="-122"/>
+                <a:cs typeface="Consolas" pitchFamily="34" charset="-120"/>
+              </a:rPr>
+              <a:t>  len(s) ≥ 0</a:t>
+            </a:r>
+            <a:endParaRPr lang="en-US" sz="1000" dirty="0"/>
           </a:p>
         </p:txBody>
       </p:sp>
@@ -3162,7 +3168,7 @@
     <p:bg>
       <p:bgPr>
         <a:solidFill>
-          <a:srgbClr val="0F172A"/>
+          <a:srgbClr val="0B2027"/>
         </a:solidFill>
       </p:bgPr>
     </p:bg>
@@ -3189,13 +3195,13 @@
         <p:spPr>
           <a:xfrm>
             <a:off x="0" y="0"/>
-            <a:ext cx="9144000" cy="73152"/>
+            <a:ext cx="9144000" cy="54864"/>
           </a:xfrm>
           <a:prstGeom prst="rect">
             <a:avLst/>
           </a:prstGeom>
           <a:solidFill>
-            <a:srgbClr val="DC2626"/>
+            <a:srgbClr val="0891B2"/>
           </a:solidFill>
           <a:ln/>
         </p:spPr>
@@ -3208,8 +3214,8 @@
         </p:nvSpPr>
         <p:spPr>
           <a:xfrm>
-            <a:off x="457200" y="182880"/>
-            <a:ext cx="7315200" cy="457200"/>
+            <a:off x="548640" y="274320"/>
+            <a:ext cx="8229600" cy="548640"/>
           </a:xfrm>
           <a:prstGeom prst="rect">
             <a:avLst/>
@@ -3218,24 +3224,24 @@
           <a:ln/>
         </p:spPr>
         <p:txBody>
-          <a:bodyPr wrap="square" rtlCol="0" anchor="ctr"/>
+          <a:bodyPr wrap="square" lIns="0" tIns="0" rIns="0" bIns="0" rtlCol="0" anchor="ctr"/>
           <a:lstStyle/>
           <a:p>
             <a:pPr indent="0" marL="0">
               <a:buNone/>
             </a:pPr>
             <a:r>
-              <a:rPr lang="en-US" sz="2200" b="1" dirty="0">
-                <a:solidFill>
-                  <a:srgbClr val="DC2626"/>
-                </a:solidFill>
-                <a:latin typeface="Trebuchet MS" pitchFamily="34" charset="0"/>
-                <a:ea typeface="Trebuchet MS" pitchFamily="34" charset="-122"/>
-                <a:cs typeface="Trebuchet MS" pitchFamily="34" charset="-120"/>
-              </a:rPr>
-              <a:t>NOTES ENSEIGNANT — Ch.5 P3 Notation formelle</a:t>
-            </a:r>
-            <a:endParaRPr lang="en-US" sz="2200" dirty="0"/>
+              <a:rPr lang="en-US" sz="2400" b="1" dirty="0">
+                <a:solidFill>
+                  <a:srgbClr val="FFFFFF"/>
+                </a:solidFill>
+                <a:latin typeface="Calibri" pitchFamily="34" charset="0"/>
+                <a:ea typeface="Calibri" pitchFamily="34" charset="-122"/>
+                <a:cs typeface="Calibri" pitchFamily="34" charset="-120"/>
+              </a:rPr>
+              <a:t>SDL (Specification and Description Language)</a:t>
+            </a:r>
+            <a:endParaRPr lang="en-US" sz="2400" dirty="0"/>
           </a:p>
         </p:txBody>
       </p:sp>
@@ -3247,8 +3253,8 @@
         </p:nvSpPr>
         <p:spPr>
           <a:xfrm>
-            <a:off x="457200" y="731520"/>
-            <a:ext cx="8229600" cy="4114800"/>
+            <a:off x="548640" y="1005840"/>
+            <a:ext cx="8046720" cy="3657600"/>
           </a:xfrm>
           <a:prstGeom prst="rect">
             <a:avLst/>
@@ -3257,38 +3263,254 @@
           <a:ln/>
         </p:spPr>
         <p:txBody>
-          <a:bodyPr wrap="square" rtlCol="0" anchor="ctr"/>
+          <a:bodyPr wrap="square" rtlCol="0" anchor="t"/>
+          <a:lstStyle/>
+          <a:p>
+            <a:pPr marL="342900" indent="-342900">
+              <a:lnSpc>
+                <a:spcPct val="130000"/>
+              </a:lnSpc>
+              <a:buSzPct val="100000"/>
+              <a:buChar char="•"/>
+            </a:pPr>
+            <a:r>
+              <a:rPr lang="en-US" sz="1400" dirty="0">
+                <a:solidFill>
+                  <a:srgbClr val="E2E8F0"/>
+                </a:solidFill>
+                <a:latin typeface="Calibri" pitchFamily="34" charset="0"/>
+                <a:ea typeface="Calibri" pitchFamily="34" charset="-122"/>
+                <a:cs typeface="Calibri" pitchFamily="34" charset="-120"/>
+              </a:rPr>
+              <a:t>Langage GRAPHIQUE pour systèmes réactifs</a:t>
+            </a:r>
+            <a:endParaRPr lang="en-US" sz="1400" dirty="0"/>
+          </a:p>
+          <a:p>
+            <a:pPr marL="342900" indent="-342900">
+              <a:lnSpc>
+                <a:spcPct val="130000"/>
+              </a:lnSpc>
+              <a:buSzPct val="100000"/>
+              <a:buChar char="•"/>
+            </a:pPr>
+            <a:r>
+              <a:rPr lang="en-US" sz="1400" dirty="0">
+                <a:solidFill>
+                  <a:srgbClr val="E2E8F0"/>
+                </a:solidFill>
+                <a:latin typeface="Calibri" pitchFamily="34" charset="0"/>
+                <a:ea typeface="Calibri" pitchFamily="34" charset="-122"/>
+                <a:cs typeface="Calibri" pitchFamily="34" charset="-120"/>
+              </a:rPr>
+              <a:t>Basé sur des automates : états + transitions</a:t>
+            </a:r>
+            <a:endParaRPr lang="en-US" sz="1400" dirty="0"/>
+          </a:p>
+          <a:p>
+            <a:pPr marL="342900" indent="-342900">
+              <a:lnSpc>
+                <a:spcPct val="130000"/>
+              </a:lnSpc>
+              <a:buSzPct val="100000"/>
+              <a:buChar char="•"/>
+            </a:pPr>
+            <a:r>
+              <a:rPr lang="en-US" sz="1400" dirty="0">
+                <a:solidFill>
+                  <a:srgbClr val="E2E8F0"/>
+                </a:solidFill>
+                <a:latin typeface="Calibri" pitchFamily="34" charset="0"/>
+                <a:ea typeface="Calibri" pitchFamily="34" charset="-122"/>
+                <a:cs typeface="Calibri" pitchFamily="34" charset="-120"/>
+              </a:rPr>
+              <a:t>Processus = rectangle arrondi avec états internes</a:t>
+            </a:r>
+            <a:endParaRPr lang="en-US" sz="1400" dirty="0"/>
+          </a:p>
+          <a:p>
+            <a:pPr marL="342900" indent="-342900">
+              <a:lnSpc>
+                <a:spcPct val="130000"/>
+              </a:lnSpc>
+              <a:buSzPct val="100000"/>
+              <a:buChar char="•"/>
+            </a:pPr>
+            <a:r>
+              <a:rPr lang="en-US" sz="1400" dirty="0">
+                <a:solidFill>
+                  <a:srgbClr val="E2E8F0"/>
+                </a:solidFill>
+                <a:latin typeface="Calibri" pitchFamily="34" charset="0"/>
+                <a:ea typeface="Calibri" pitchFamily="34" charset="-122"/>
+                <a:cs typeface="Calibri" pitchFamily="34" charset="-120"/>
+              </a:rPr>
+              <a:t>Signal = événement envoyé entre processus (flèche)</a:t>
+            </a:r>
+            <a:endParaRPr lang="en-US" sz="1400" dirty="0"/>
+          </a:p>
+          <a:p>
+            <a:pPr marL="342900" indent="-342900">
+              <a:lnSpc>
+                <a:spcPct val="130000"/>
+              </a:lnSpc>
+              <a:buSzPct val="100000"/>
+              <a:buChar char="•"/>
+            </a:pPr>
+            <a:r>
+              <a:rPr lang="en-US" sz="1400" dirty="0">
+                <a:solidFill>
+                  <a:srgbClr val="E2E8F0"/>
+                </a:solidFill>
+                <a:latin typeface="Calibri" pitchFamily="34" charset="0"/>
+                <a:ea typeface="Calibri" pitchFamily="34" charset="-122"/>
+                <a:cs typeface="Calibri" pitchFamily="34" charset="-120"/>
+              </a:rPr>
+              <a:t>Utilisé en télécom, systèmes embarqués</a:t>
+            </a:r>
+            <a:endParaRPr lang="en-US" sz="1400" dirty="0"/>
+          </a:p>
+          <a:p>
+            <a:pPr marL="342900" indent="-342900">
+              <a:lnSpc>
+                <a:spcPct val="130000"/>
+              </a:lnSpc>
+              <a:buSzPct val="100000"/>
+              <a:buChar char="•"/>
+            </a:pPr>
+            <a:r>
+              <a:rPr lang="en-US" sz="1400" dirty="0">
+                <a:solidFill>
+                  <a:srgbClr val="E2E8F0"/>
+                </a:solidFill>
+                <a:latin typeface="Calibri" pitchFamily="34" charset="0"/>
+                <a:ea typeface="Calibri" pitchFamily="34" charset="-122"/>
+                <a:cs typeface="Calibri" pitchFamily="34" charset="-120"/>
+              </a:rPr>
+              <a:t>Complémentaire à VDM (graphique vs textuel)</a:t>
+            </a:r>
+            <a:endParaRPr lang="en-US" sz="1400" dirty="0"/>
+          </a:p>
+        </p:txBody>
+      </p:sp>
+    </p:spTree>
+  </p:cSld>
+  <p:clrMapOvr>
+    <a:masterClrMapping/>
+  </p:clrMapOvr>
+</p:sld>
+</file>
+
+<file path=ppt/slides/slide7.xml><?xml version="1.0" encoding="utf-8"?>
+<p:sld xmlns:a="http://schemas.openxmlformats.org/drawingml/2006/main" xmlns:r="http://schemas.openxmlformats.org/officeDocument/2006/relationships" xmlns:p="http://schemas.openxmlformats.org/presentationml/2006/main">
+  <p:cSld name="Slide 7">
+    <p:bg>
+      <p:bgPr>
+        <a:solidFill>
+          <a:srgbClr val="0B2027"/>
+        </a:solidFill>
+      </p:bgPr>
+    </p:bg>
+    <p:spTree>
+      <p:nvGrpSpPr>
+        <p:cNvPr id="1" name=""/>
+        <p:cNvGrpSpPr/>
+        <p:nvPr/>
+      </p:nvGrpSpPr>
+      <p:grpSpPr>
+        <a:xfrm>
+          <a:off x="0" y="0"/>
+          <a:ext cx="0" cy="0"/>
+          <a:chOff x="0" y="0"/>
+          <a:chExt cx="0" cy="0"/>
+        </a:xfrm>
+      </p:grpSpPr>
+      <p:sp>
+        <p:nvSpPr>
+          <p:cNvPr id="2" name="Shape 0"/>
+          <p:cNvSpPr/>
+          <p:nvPr/>
+        </p:nvSpPr>
+        <p:spPr>
+          <a:xfrm>
+            <a:off x="0" y="0"/>
+            <a:ext cx="9144000" cy="54864"/>
+          </a:xfrm>
+          <a:prstGeom prst="rect">
+            <a:avLst/>
+          </a:prstGeom>
+          <a:solidFill>
+            <a:srgbClr val="0891B2"/>
+          </a:solidFill>
+          <a:ln/>
+        </p:spPr>
+      </p:sp>
+      <p:sp>
+        <p:nvSpPr>
+          <p:cNvPr id="3" name="Text 1"/>
+          <p:cNvSpPr/>
+          <p:nvPr/>
+        </p:nvSpPr>
+        <p:spPr>
+          <a:xfrm>
+            <a:off x="548640" y="274320"/>
+            <a:ext cx="8229600" cy="548640"/>
+          </a:xfrm>
+          <a:prstGeom prst="rect">
+            <a:avLst/>
+          </a:prstGeom>
+          <a:noFill/>
+          <a:ln/>
+        </p:spPr>
+        <p:txBody>
+          <a:bodyPr wrap="square" lIns="0" tIns="0" rIns="0" bIns="0" rtlCol="0" anchor="ctr"/>
           <a:lstStyle/>
           <a:p>
             <a:pPr indent="0" marL="0">
               <a:buNone/>
             </a:pPr>
             <a:r>
-              <a:rPr lang="en-US" sz="1500" b="1" dirty="0">
-                <a:solidFill>
-                  <a:srgbClr val="00A896"/>
-                </a:solidFill>
-                <a:latin typeface="Trebuchet MS" pitchFamily="34" charset="0"/>
-                <a:ea typeface="Trebuchet MS" pitchFamily="34" charset="-122"/>
-                <a:cs typeface="Trebuchet MS" pitchFamily="34" charset="-120"/>
-              </a:rPr>
-              <a:t>Plan de séance :</a:t>
-            </a:r>
-            <a:endParaRPr lang="en-US" sz="1500" dirty="0"/>
-          </a:p>
-          <a:p>
-            <a:pPr indent="0" marL="0">
-              <a:buNone/>
-            </a:pPr>
-            <a:endParaRPr lang="en-US" sz="1500" dirty="0"/>
-          </a:p>
+              <a:rPr lang="en-US" sz="2400" b="1" dirty="0">
+                <a:solidFill>
+                  <a:srgbClr val="FFFFFF"/>
+                </a:solidFill>
+                <a:latin typeface="Calibri" pitchFamily="34" charset="0"/>
+                <a:ea typeface="Calibri" pitchFamily="34" charset="-122"/>
+                <a:cs typeface="Calibri" pitchFamily="34" charset="-120"/>
+              </a:rPr>
+              <a:t>ASN.1 (Abstract Syntax Notation One)</a:t>
+            </a:r>
+            <a:endParaRPr lang="en-US" sz="2400" dirty="0"/>
+          </a:p>
+        </p:txBody>
+      </p:sp>
+      <p:sp>
+        <p:nvSpPr>
+          <p:cNvPr id="4" name="Text 2"/>
+          <p:cNvSpPr/>
+          <p:nvPr/>
+        </p:nvSpPr>
+        <p:spPr>
+          <a:xfrm>
+            <a:off x="548640" y="1005840"/>
+            <a:ext cx="3840480" cy="3200400"/>
+          </a:xfrm>
+          <a:prstGeom prst="rect">
+            <a:avLst/>
+          </a:prstGeom>
+          <a:noFill/>
+          <a:ln/>
+        </p:spPr>
+        <p:txBody>
+          <a:bodyPr wrap="square" rtlCol="0" anchor="t"/>
+          <a:lstStyle/>
           <a:p>
             <a:pPr marL="342900" indent="-342900">
               <a:buSzPct val="100000"/>
               <a:buChar char="•"/>
             </a:pPr>
             <a:r>
-              <a:rPr lang="en-US" sz="1200" dirty="0">
+              <a:rPr lang="en-US" sz="1300" dirty="0">
                 <a:solidFill>
                   <a:srgbClr val="E2E8F0"/>
                 </a:solidFill>
@@ -3296,9 +3518,9 @@
                 <a:ea typeface="Calibri" pitchFamily="34" charset="-122"/>
                 <a:cs typeface="Calibri" pitchFamily="34" charset="-120"/>
               </a:rPr>
-              <a:t>P1 : Rappel ADT (Ch.1) + introduction notation impérative</a:t>
-            </a:r>
-            <a:endParaRPr lang="en-US" sz="1500" dirty="0"/>
+              <a:t>Notation standard ISO pour décrire structures de données</a:t>
+            </a:r>
+            <a:endParaRPr lang="en-US" sz="1300" dirty="0"/>
           </a:p>
           <a:p>
             <a:pPr marL="342900" indent="-342900">
@@ -3306,7 +3528,7 @@
               <a:buChar char="•"/>
             </a:pPr>
             <a:r>
-              <a:rPr lang="en-US" sz="1200" dirty="0">
+              <a:rPr lang="en-US" sz="1300" dirty="0">
                 <a:solidFill>
                   <a:srgbClr val="E2E8F0"/>
                 </a:solidFill>
@@ -3314,9 +3536,9 @@
                 <a:ea typeface="Calibri" pitchFamily="34" charset="-122"/>
                 <a:cs typeface="Calibri" pitchFamily="34" charset="-120"/>
               </a:rPr>
-              <a:t>P2 : Écrire la spec complète d'un Stack ensemble au tableau</a:t>
-            </a:r>
-            <a:endParaRPr lang="en-US" sz="1500" dirty="0"/>
+              <a:t>Indépendant du langage de programmation</a:t>
+            </a:r>
+            <a:endParaRPr lang="en-US" sz="1300" dirty="0"/>
           </a:p>
           <a:p>
             <a:pPr marL="342900" indent="-342900">
@@ -3324,7 +3546,7 @@
               <a:buChar char="•"/>
             </a:pPr>
             <a:r>
-              <a:rPr lang="en-US" sz="1200" dirty="0">
+              <a:rPr lang="en-US" sz="1300" dirty="0">
                 <a:solidFill>
                   <a:srgbClr val="E2E8F0"/>
                 </a:solidFill>
@@ -3332,9 +3554,9 @@
                 <a:ea typeface="Calibri" pitchFamily="34" charset="-122"/>
                 <a:cs typeface="Calibri" pitchFamily="34" charset="-120"/>
               </a:rPr>
-              <a:t>P3 : Mini-jeu web (constructeur de spec) + axiomes</a:t>
-            </a:r>
-            <a:endParaRPr lang="en-US" sz="1500" dirty="0"/>
+              <a:t>Type SEQUENCE = équivalent d'un objet/struct</a:t>
+            </a:r>
+            <a:endParaRPr lang="en-US" sz="1300" dirty="0"/>
           </a:p>
           <a:p>
             <a:pPr marL="342900" indent="-342900">
@@ -3342,7 +3564,7 @@
               <a:buChar char="•"/>
             </a:pPr>
             <a:r>
-              <a:rPr lang="en-US" sz="1200" dirty="0">
+              <a:rPr lang="en-US" sz="1300" dirty="0">
                 <a:solidFill>
                   <a:srgbClr val="E2E8F0"/>
                 </a:solidFill>
@@ -3350,32 +3572,9 @@
                 <a:ea typeface="Calibri" pitchFamily="34" charset="-122"/>
                 <a:cs typeface="Calibri" pitchFamily="34" charset="-120"/>
               </a:rPr>
-              <a:t>P4 : Exercice : spécifier un ADT Queue en notation impérative</a:t>
-            </a:r>
-            <a:endParaRPr lang="en-US" sz="1500" dirty="0"/>
-          </a:p>
-          <a:p>
-            <a:pPr indent="0" marL="0">
-              <a:buNone/>
-            </a:pPr>
-            <a:endParaRPr lang="en-US" sz="1500" dirty="0"/>
-          </a:p>
-          <a:p>
-            <a:pPr indent="0" marL="0">
-              <a:buNone/>
-            </a:pPr>
-            <a:r>
-              <a:rPr lang="en-US" sz="1400" b="1" dirty="0">
-                <a:solidFill>
-                  <a:srgbClr val="F97316"/>
-                </a:solidFill>
-                <a:latin typeface="Calibri" pitchFamily="34" charset="0"/>
-                <a:ea typeface="Calibri" pitchFamily="34" charset="-122"/>
-                <a:cs typeface="Calibri" pitchFamily="34" charset="-120"/>
-              </a:rPr>
-              <a:t>Critère P3 — l'étudiant doit :</a:t>
-            </a:r>
-            <a:endParaRPr lang="en-US" sz="1500" dirty="0"/>
+              <a:t>Utilisé pour les protocoles réseau, certificats SSL</a:t>
+            </a:r>
+            <a:endParaRPr lang="en-US" sz="1300" dirty="0"/>
           </a:p>
           <a:p>
             <a:pPr marL="342900" indent="-342900">
@@ -3383,7 +3582,7 @@
               <a:buChar char="•"/>
             </a:pPr>
             <a:r>
-              <a:rPr lang="en-US" sz="1200" dirty="0">
+              <a:rPr lang="en-US" sz="1300" dirty="0">
                 <a:solidFill>
                   <a:srgbClr val="E2E8F0"/>
                 </a:solidFill>
@@ -3391,17 +3590,359 @@
                 <a:ea typeface="Calibri" pitchFamily="34" charset="-122"/>
                 <a:cs typeface="Calibri" pitchFamily="34" charset="-120"/>
               </a:rPr>
-              <a:t>Spécifier un Stack complet en notation impérative</a:t>
-            </a:r>
-            <a:endParaRPr lang="en-US" sz="1500" dirty="0"/>
-          </a:p>
+              <a:t>Permet l'encodage automatique (BER, DER, PER)</a:t>
+            </a:r>
+            <a:endParaRPr lang="en-US" sz="1300" dirty="0"/>
+          </a:p>
+        </p:txBody>
+      </p:sp>
+      <p:sp>
+        <p:nvSpPr>
+          <p:cNvPr id="5" name="Shape 3"/>
+          <p:cNvSpPr/>
+          <p:nvPr/>
+        </p:nvSpPr>
+        <p:spPr>
+          <a:xfrm>
+            <a:off x="4754880" y="1005840"/>
+            <a:ext cx="4023360" cy="3200400"/>
+          </a:xfrm>
+          <a:prstGeom prst="roundRect">
+            <a:avLst>
+              <a:gd name="adj" fmla="val 2857"/>
+            </a:avLst>
+          </a:prstGeom>
+          <a:solidFill>
+            <a:srgbClr val="0D1117"/>
+          </a:solidFill>
+          <a:ln/>
+        </p:spPr>
+      </p:sp>
+      <p:sp>
+        <p:nvSpPr>
+          <p:cNvPr id="6" name="Text 4"/>
+          <p:cNvSpPr/>
+          <p:nvPr/>
+        </p:nvSpPr>
+        <p:spPr>
+          <a:xfrm>
+            <a:off x="4937760" y="1143000"/>
+            <a:ext cx="3657600" cy="2926080"/>
+          </a:xfrm>
+          <a:prstGeom prst="rect">
+            <a:avLst/>
+          </a:prstGeom>
+          <a:noFill/>
+          <a:ln/>
+        </p:spPr>
+        <p:txBody>
+          <a:bodyPr wrap="square" rtlCol="0" anchor="t"/>
+          <a:lstStyle/>
+          <a:p>
+            <a:pPr indent="0" marL="0">
+              <a:buNone/>
+            </a:pPr>
+            <a:r>
+              <a:rPr lang="en-US" sz="1000" dirty="0">
+                <a:solidFill>
+                  <a:srgbClr val="A5F3FC"/>
+                </a:solidFill>
+                <a:latin typeface="Consolas" pitchFamily="34" charset="0"/>
+                <a:ea typeface="Consolas" pitchFamily="34" charset="-122"/>
+                <a:cs typeface="Consolas" pitchFamily="34" charset="-120"/>
+              </a:rPr>
+              <a:t>// Exemple ASN.1</a:t>
+            </a:r>
+            <a:endParaRPr lang="en-US" sz="1000" dirty="0"/>
+          </a:p>
+          <a:p>
+            <a:pPr indent="0" marL="0">
+              <a:buNone/>
+            </a:pPr>
+            <a:endParaRPr lang="en-US" sz="1000" dirty="0"/>
+          </a:p>
+          <a:p>
+            <a:pPr indent="0" marL="0">
+              <a:buNone/>
+            </a:pPr>
+            <a:r>
+              <a:rPr lang="en-US" sz="1000" dirty="0">
+                <a:solidFill>
+                  <a:srgbClr val="A5F3FC"/>
+                </a:solidFill>
+                <a:latin typeface="Consolas" pitchFamily="34" charset="0"/>
+                <a:ea typeface="Consolas" pitchFamily="34" charset="-122"/>
+                <a:cs typeface="Consolas" pitchFamily="34" charset="-120"/>
+              </a:rPr>
+              <a:t>Student ::= SEQUENCE {</a:t>
+            </a:r>
+            <a:endParaRPr lang="en-US" sz="1000" dirty="0"/>
+          </a:p>
+          <a:p>
+            <a:pPr indent="0" marL="0">
+              <a:buNone/>
+            </a:pPr>
+            <a:r>
+              <a:rPr lang="en-US" sz="1000" dirty="0">
+                <a:solidFill>
+                  <a:srgbClr val="A5F3FC"/>
+                </a:solidFill>
+                <a:latin typeface="Consolas" pitchFamily="34" charset="0"/>
+                <a:ea typeface="Consolas" pitchFamily="34" charset="-122"/>
+                <a:cs typeface="Consolas" pitchFamily="34" charset="-120"/>
+              </a:rPr>
+              <a:t>  name     UTF8String,</a:t>
+            </a:r>
+            <a:endParaRPr lang="en-US" sz="1000" dirty="0"/>
+          </a:p>
+          <a:p>
+            <a:pPr indent="0" marL="0">
+              <a:buNone/>
+            </a:pPr>
+            <a:r>
+              <a:rPr lang="en-US" sz="1000" dirty="0">
+                <a:solidFill>
+                  <a:srgbClr val="A5F3FC"/>
+                </a:solidFill>
+                <a:latin typeface="Consolas" pitchFamily="34" charset="0"/>
+                <a:ea typeface="Consolas" pitchFamily="34" charset="-122"/>
+                <a:cs typeface="Consolas" pitchFamily="34" charset="-120"/>
+              </a:rPr>
+              <a:t>  age      INTEGER (0..150),</a:t>
+            </a:r>
+            <a:endParaRPr lang="en-US" sz="1000" dirty="0"/>
+          </a:p>
+          <a:p>
+            <a:pPr indent="0" marL="0">
+              <a:buNone/>
+            </a:pPr>
+            <a:r>
+              <a:rPr lang="en-US" sz="1000" dirty="0">
+                <a:solidFill>
+                  <a:srgbClr val="A5F3FC"/>
+                </a:solidFill>
+                <a:latin typeface="Consolas" pitchFamily="34" charset="0"/>
+                <a:ea typeface="Consolas" pitchFamily="34" charset="-122"/>
+                <a:cs typeface="Consolas" pitchFamily="34" charset="-120"/>
+              </a:rPr>
+              <a:t>  enrolled BOOLEAN</a:t>
+            </a:r>
+            <a:endParaRPr lang="en-US" sz="1000" dirty="0"/>
+          </a:p>
+          <a:p>
+            <a:pPr indent="0" marL="0">
+              <a:buNone/>
+            </a:pPr>
+            <a:r>
+              <a:rPr lang="en-US" sz="1000" dirty="0">
+                <a:solidFill>
+                  <a:srgbClr val="A5F3FC"/>
+                </a:solidFill>
+                <a:latin typeface="Consolas" pitchFamily="34" charset="0"/>
+                <a:ea typeface="Consolas" pitchFamily="34" charset="-122"/>
+                <a:cs typeface="Consolas" pitchFamily="34" charset="-120"/>
+              </a:rPr>
+              <a:t>}</a:t>
+            </a:r>
+            <a:endParaRPr lang="en-US" sz="1000" dirty="0"/>
+          </a:p>
+          <a:p>
+            <a:pPr indent="0" marL="0">
+              <a:buNone/>
+            </a:pPr>
+            <a:endParaRPr lang="en-US" sz="1000" dirty="0"/>
+          </a:p>
+          <a:p>
+            <a:pPr indent="0" marL="0">
+              <a:buNone/>
+            </a:pPr>
+            <a:r>
+              <a:rPr lang="en-US" sz="1000" dirty="0">
+                <a:solidFill>
+                  <a:srgbClr val="A5F3FC"/>
+                </a:solidFill>
+                <a:latin typeface="Consolas" pitchFamily="34" charset="0"/>
+                <a:ea typeface="Consolas" pitchFamily="34" charset="-122"/>
+                <a:cs typeface="Consolas" pitchFamily="34" charset="-120"/>
+              </a:rPr>
+              <a:t>Stack ::= SEQUENCE {</a:t>
+            </a:r>
+            <a:endParaRPr lang="en-US" sz="1000" dirty="0"/>
+          </a:p>
+          <a:p>
+            <a:pPr indent="0" marL="0">
+              <a:buNone/>
+            </a:pPr>
+            <a:r>
+              <a:rPr lang="en-US" sz="1000" dirty="0">
+                <a:solidFill>
+                  <a:srgbClr val="A5F3FC"/>
+                </a:solidFill>
+                <a:latin typeface="Consolas" pitchFamily="34" charset="0"/>
+                <a:ea typeface="Consolas" pitchFamily="34" charset="-122"/>
+                <a:cs typeface="Consolas" pitchFamily="34" charset="-120"/>
+              </a:rPr>
+              <a:t>  elements SEQUENCE OF ANY,</a:t>
+            </a:r>
+            <a:endParaRPr lang="en-US" sz="1000" dirty="0"/>
+          </a:p>
+          <a:p>
+            <a:pPr indent="0" marL="0">
+              <a:buNone/>
+            </a:pPr>
+            <a:r>
+              <a:rPr lang="en-US" sz="1000" dirty="0">
+                <a:solidFill>
+                  <a:srgbClr val="A5F3FC"/>
+                </a:solidFill>
+                <a:latin typeface="Consolas" pitchFamily="34" charset="0"/>
+                <a:ea typeface="Consolas" pitchFamily="34" charset="-122"/>
+                <a:cs typeface="Consolas" pitchFamily="34" charset="-120"/>
+              </a:rPr>
+              <a:t>  size     INTEGER (0..MAX)</a:t>
+            </a:r>
+            <a:endParaRPr lang="en-US" sz="1000" dirty="0"/>
+          </a:p>
+          <a:p>
+            <a:pPr indent="0" marL="0">
+              <a:buNone/>
+            </a:pPr>
+            <a:r>
+              <a:rPr lang="en-US" sz="1000" dirty="0">
+                <a:solidFill>
+                  <a:srgbClr val="A5F3FC"/>
+                </a:solidFill>
+                <a:latin typeface="Consolas" pitchFamily="34" charset="0"/>
+                <a:ea typeface="Consolas" pitchFamily="34" charset="-122"/>
+                <a:cs typeface="Consolas" pitchFamily="34" charset="-120"/>
+              </a:rPr>
+              <a:t>}</a:t>
+            </a:r>
+            <a:endParaRPr lang="en-US" sz="1000" dirty="0"/>
+          </a:p>
+        </p:txBody>
+      </p:sp>
+    </p:spTree>
+  </p:cSld>
+  <p:clrMapOvr>
+    <a:masterClrMapping/>
+  </p:clrMapOvr>
+</p:sld>
+</file>
+
+<file path=ppt/slides/slide8.xml><?xml version="1.0" encoding="utf-8"?>
+<p:sld xmlns:a="http://schemas.openxmlformats.org/drawingml/2006/main" xmlns:r="http://schemas.openxmlformats.org/officeDocument/2006/relationships" xmlns:p="http://schemas.openxmlformats.org/presentationml/2006/main">
+  <p:cSld name="Slide 8">
+    <p:bg>
+      <p:bgPr>
+        <a:solidFill>
+          <a:srgbClr val="0B2027"/>
+        </a:solidFill>
+      </p:bgPr>
+    </p:bg>
+    <p:spTree>
+      <p:nvGrpSpPr>
+        <p:cNvPr id="1" name=""/>
+        <p:cNvGrpSpPr/>
+        <p:nvPr/>
+      </p:nvGrpSpPr>
+      <p:grpSpPr>
+        <a:xfrm>
+          <a:off x="0" y="0"/>
+          <a:ext cx="0" cy="0"/>
+          <a:chOff x="0" y="0"/>
+          <a:chExt cx="0" cy="0"/>
+        </a:xfrm>
+      </p:grpSpPr>
+      <p:sp>
+        <p:nvSpPr>
+          <p:cNvPr id="2" name="Shape 0"/>
+          <p:cNvSpPr/>
+          <p:nvPr/>
+        </p:nvSpPr>
+        <p:spPr>
+          <a:xfrm>
+            <a:off x="0" y="0"/>
+            <a:ext cx="9144000" cy="54864"/>
+          </a:xfrm>
+          <a:prstGeom prst="rect">
+            <a:avLst/>
+          </a:prstGeom>
+          <a:solidFill>
+            <a:srgbClr val="0891B2"/>
+          </a:solidFill>
+          <a:ln/>
+        </p:spPr>
+      </p:sp>
+      <p:sp>
+        <p:nvSpPr>
+          <p:cNvPr id="3" name="Text 1"/>
+          <p:cNvSpPr/>
+          <p:nvPr/>
+        </p:nvSpPr>
+        <p:spPr>
+          <a:xfrm>
+            <a:off x="548640" y="274320"/>
+            <a:ext cx="8229600" cy="548640"/>
+          </a:xfrm>
+          <a:prstGeom prst="rect">
+            <a:avLst/>
+          </a:prstGeom>
+          <a:noFill/>
+          <a:ln/>
+        </p:spPr>
+        <p:txBody>
+          <a:bodyPr wrap="square" lIns="0" tIns="0" rIns="0" bIns="0" rtlCol="0" anchor="ctr"/>
+          <a:lstStyle/>
+          <a:p>
+            <a:pPr indent="0" marL="0">
+              <a:buNone/>
+            </a:pPr>
+            <a:r>
+              <a:rPr lang="en-US" sz="2400" b="1" dirty="0">
+                <a:solidFill>
+                  <a:srgbClr val="FFFFFF"/>
+                </a:solidFill>
+                <a:latin typeface="Calibri" pitchFamily="34" charset="0"/>
+                <a:ea typeface="Calibri" pitchFamily="34" charset="-122"/>
+                <a:cs typeface="Calibri" pitchFamily="34" charset="-120"/>
+              </a:rPr>
+              <a:t>PRE / POST / INVARIANT / AXIOME</a:t>
+            </a:r>
+            <a:endParaRPr lang="en-US" sz="2400" dirty="0"/>
+          </a:p>
+        </p:txBody>
+      </p:sp>
+      <p:sp>
+        <p:nvSpPr>
+          <p:cNvPr id="4" name="Text 2"/>
+          <p:cNvSpPr/>
+          <p:nvPr/>
+        </p:nvSpPr>
+        <p:spPr>
+          <a:xfrm>
+            <a:off x="548640" y="1005840"/>
+            <a:ext cx="8046720" cy="3657600"/>
+          </a:xfrm>
+          <a:prstGeom prst="rect">
+            <a:avLst/>
+          </a:prstGeom>
+          <a:noFill/>
+          <a:ln/>
+        </p:spPr>
+        <p:txBody>
+          <a:bodyPr wrap="square" rtlCol="0" anchor="t"/>
+          <a:lstStyle/>
           <a:p>
             <a:pPr marL="342900" indent="-342900">
+              <a:lnSpc>
+                <a:spcPct val="130000"/>
+              </a:lnSpc>
               <a:buSzPct val="100000"/>
               <a:buChar char="•"/>
             </a:pPr>
             <a:r>
-              <a:rPr lang="en-US" sz="1200" dirty="0">
+              <a:rPr lang="en-US" sz="1400" dirty="0">
                 <a:solidFill>
                   <a:srgbClr val="E2E8F0"/>
                 </a:solidFill>
@@ -3409,17 +3950,20 @@
                 <a:ea typeface="Calibri" pitchFamily="34" charset="-122"/>
                 <a:cs typeface="Calibri" pitchFamily="34" charset="-120"/>
               </a:rPr>
-              <a:t>Inclure : description, opérations avec signatures, PRE, POST</a:t>
-            </a:r>
-            <a:endParaRPr lang="en-US" sz="1500" dirty="0"/>
+              <a:t>PRE-condition : ce qui DOIT être vrai AVANT l'appel</a:t>
+            </a:r>
+            <a:endParaRPr lang="en-US" sz="1400" dirty="0"/>
           </a:p>
           <a:p>
             <a:pPr marL="342900" indent="-342900">
+              <a:lnSpc>
+                <a:spcPct val="130000"/>
+              </a:lnSpc>
               <a:buSzPct val="100000"/>
               <a:buChar char="•"/>
             </a:pPr>
             <a:r>
-              <a:rPr lang="en-US" sz="1200" dirty="0">
+              <a:rPr lang="en-US" sz="1400" dirty="0">
                 <a:solidFill>
                   <a:srgbClr val="E2E8F0"/>
                 </a:solidFill>
@@ -3427,17 +3971,20 @@
                 <a:ea typeface="Calibri" pitchFamily="34" charset="-122"/>
                 <a:cs typeface="Calibri" pitchFamily="34" charset="-120"/>
               </a:rPr>
-              <a:t>Définir les invariants et au moins 3 axiomes</a:t>
-            </a:r>
-            <a:endParaRPr lang="en-US" sz="1500" dirty="0"/>
+              <a:t>POST-condition : ce qui est GARANTI APRÈS l'appel</a:t>
+            </a:r>
+            <a:endParaRPr lang="en-US" sz="1400" dirty="0"/>
           </a:p>
           <a:p>
             <a:pPr marL="342900" indent="-342900">
+              <a:lnSpc>
+                <a:spcPct val="130000"/>
+              </a:lnSpc>
               <a:buSzPct val="100000"/>
               <a:buChar char="•"/>
             </a:pPr>
             <a:r>
-              <a:rPr lang="en-US" sz="1200" dirty="0">
+              <a:rPr lang="en-US" sz="1400" dirty="0">
                 <a:solidFill>
                   <a:srgbClr val="E2E8F0"/>
                 </a:solidFill>
@@ -3445,9 +3992,687 @@
                 <a:ea typeface="Calibri" pitchFamily="34" charset="-122"/>
                 <a:cs typeface="Calibri" pitchFamily="34" charset="-120"/>
               </a:rPr>
-              <a:t>Expliquer le lien entre chaque élément de la spec et son implémentation Java</a:t>
-            </a:r>
-            <a:endParaRPr lang="en-US" sz="1500" dirty="0"/>
+              <a:t>INVARIANT : ce qui est TOUJOURS vrai entre les opérations</a:t>
+            </a:r>
+            <a:endParaRPr lang="en-US" sz="1400" dirty="0"/>
+          </a:p>
+          <a:p>
+            <a:pPr marL="342900" indent="-342900">
+              <a:lnSpc>
+                <a:spcPct val="130000"/>
+              </a:lnSpc>
+              <a:buSzPct val="100000"/>
+              <a:buChar char="•"/>
+            </a:pPr>
+            <a:r>
+              <a:rPr lang="en-US" sz="1400" dirty="0">
+                <a:solidFill>
+                  <a:srgbClr val="E2E8F0"/>
+                </a:solidFill>
+                <a:latin typeface="Calibri" pitchFamily="34" charset="0"/>
+                <a:ea typeface="Calibri" pitchFamily="34" charset="-122"/>
+                <a:cs typeface="Calibri" pitchFamily="34" charset="-120"/>
+              </a:rPr>
+              <a:t>AXIOME : propriété mathématique fondamentale</a:t>
+            </a:r>
+            <a:endParaRPr lang="en-US" sz="1400" dirty="0"/>
+          </a:p>
+          <a:p>
+            <a:pPr marL="342900" indent="-342900">
+              <a:lnSpc>
+                <a:spcPct val="130000"/>
+              </a:lnSpc>
+              <a:buSzPct val="100000"/>
+              <a:buChar char="•"/>
+            </a:pPr>
+            <a:r>
+              <a:rPr lang="en-US" sz="1400" dirty="0">
+                <a:solidFill>
+                  <a:srgbClr val="E2E8F0"/>
+                </a:solidFill>
+                <a:latin typeface="Calibri" pitchFamily="34" charset="0"/>
+                <a:ea typeface="Calibri" pitchFamily="34" charset="-122"/>
+                <a:cs typeface="Calibri" pitchFamily="34" charset="-120"/>
+              </a:rPr>
+              <a:t>Exemple PRE: isEmpty() == false avant pop()</a:t>
+            </a:r>
+            <a:endParaRPr lang="en-US" sz="1400" dirty="0"/>
+          </a:p>
+          <a:p>
+            <a:pPr marL="342900" indent="-342900">
+              <a:lnSpc>
+                <a:spcPct val="130000"/>
+              </a:lnSpc>
+              <a:buSzPct val="100000"/>
+              <a:buChar char="•"/>
+            </a:pPr>
+            <a:r>
+              <a:rPr lang="en-US" sz="1400" dirty="0">
+                <a:solidFill>
+                  <a:srgbClr val="E2E8F0"/>
+                </a:solidFill>
+                <a:latin typeface="Calibri" pitchFamily="34" charset="0"/>
+                <a:ea typeface="Calibri" pitchFamily="34" charset="-122"/>
+                <a:cs typeface="Calibri" pitchFamily="34" charset="-120"/>
+              </a:rPr>
+              <a:t>Exemple AXIOME: pop(push(S,e)) = &lt;e, S&gt;</a:t>
+            </a:r>
+            <a:endParaRPr lang="en-US" sz="1400" dirty="0"/>
+          </a:p>
+        </p:txBody>
+      </p:sp>
+    </p:spTree>
+  </p:cSld>
+  <p:clrMapOvr>
+    <a:masterClrMapping/>
+  </p:clrMapOvr>
+</p:sld>
+</file>
+
+<file path=ppt/slides/slide9.xml><?xml version="1.0" encoding="utf-8"?>
+<p:sld xmlns:a="http://schemas.openxmlformats.org/drawingml/2006/main" xmlns:r="http://schemas.openxmlformats.org/officeDocument/2006/relationships" xmlns:p="http://schemas.openxmlformats.org/presentationml/2006/main">
+  <p:cSld name="Slide 9">
+    <p:bg>
+      <p:bgPr>
+        <a:solidFill>
+          <a:srgbClr val="0B2027"/>
+        </a:solidFill>
+      </p:bgPr>
+    </p:bg>
+    <p:spTree>
+      <p:nvGrpSpPr>
+        <p:cNvPr id="1" name=""/>
+        <p:cNvGrpSpPr/>
+        <p:nvPr/>
+      </p:nvGrpSpPr>
+      <p:grpSpPr>
+        <a:xfrm>
+          <a:off x="0" y="0"/>
+          <a:ext cx="0" cy="0"/>
+          <a:chOff x="0" y="0"/>
+          <a:chExt cx="0" cy="0"/>
+        </a:xfrm>
+      </p:grpSpPr>
+      <p:sp>
+        <p:nvSpPr>
+          <p:cNvPr id="2" name="Text 0"/>
+          <p:cNvSpPr/>
+          <p:nvPr/>
+        </p:nvSpPr>
+        <p:spPr>
+          <a:xfrm>
+            <a:off x="548640" y="274320"/>
+            <a:ext cx="8229600" cy="548640"/>
+          </a:xfrm>
+          <a:prstGeom prst="rect">
+            <a:avLst/>
+          </a:prstGeom>
+          <a:noFill/>
+          <a:ln/>
+        </p:spPr>
+        <p:txBody>
+          <a:bodyPr wrap="square" rtlCol="0" anchor="ctr"/>
+          <a:lstStyle/>
+          <a:p>
+            <a:pPr indent="0" marL="0">
+              <a:buNone/>
+            </a:pPr>
+            <a:r>
+              <a:rPr lang="en-US" sz="2800" b="1" dirty="0">
+                <a:solidFill>
+                  <a:srgbClr val="FFFFFF"/>
+                </a:solidFill>
+                <a:latin typeface="Calibri" pitchFamily="34" charset="0"/>
+                <a:ea typeface="Calibri" pitchFamily="34" charset="-122"/>
+                <a:cs typeface="Calibri" pitchFamily="34" charset="-120"/>
+              </a:rPr>
+              <a:t>Récapitulatif — Spécification formelle</a:t>
+            </a:r>
+            <a:endParaRPr lang="en-US" sz="2800" dirty="0"/>
+          </a:p>
+        </p:txBody>
+      </p:sp>
+      <p:sp>
+        <p:nvSpPr>
+          <p:cNvPr id="3" name="Shape 1"/>
+          <p:cNvSpPr/>
+          <p:nvPr/>
+        </p:nvSpPr>
+        <p:spPr>
+          <a:xfrm>
+            <a:off x="548640" y="1097280"/>
+            <a:ext cx="1920240" cy="3200400"/>
+          </a:xfrm>
+          <a:prstGeom prst="roundRect">
+            <a:avLst>
+              <a:gd name="adj" fmla="val 4762"/>
+            </a:avLst>
+          </a:prstGeom>
+          <a:solidFill>
+            <a:srgbClr val="133740"/>
+          </a:solidFill>
+          <a:ln/>
+        </p:spPr>
+      </p:sp>
+      <p:sp>
+        <p:nvSpPr>
+          <p:cNvPr id="4" name="Text 2"/>
+          <p:cNvSpPr/>
+          <p:nvPr/>
+        </p:nvSpPr>
+        <p:spPr>
+          <a:xfrm>
+            <a:off x="548640" y="1280160"/>
+            <a:ext cx="1920240" cy="457200"/>
+          </a:xfrm>
+          <a:prstGeom prst="rect">
+            <a:avLst/>
+          </a:prstGeom>
+          <a:noFill/>
+          <a:ln/>
+        </p:spPr>
+        <p:txBody>
+          <a:bodyPr wrap="square" rtlCol="0" anchor="ctr"/>
+          <a:lstStyle/>
+          <a:p>
+            <a:pPr algn="ctr" indent="0" marL="0">
+              <a:buNone/>
+            </a:pPr>
+            <a:r>
+              <a:rPr lang="en-US" sz="2800" dirty="0">
+                <a:solidFill>
+                  <a:srgbClr val="000000"/>
+                </a:solidFill>
+              </a:rPr>
+              <a:t>📝</a:t>
+            </a:r>
+            <a:endParaRPr lang="en-US" sz="2800" dirty="0"/>
+          </a:p>
+        </p:txBody>
+      </p:sp>
+      <p:sp>
+        <p:nvSpPr>
+          <p:cNvPr id="5" name="Text 3"/>
+          <p:cNvSpPr/>
+          <p:nvPr/>
+        </p:nvSpPr>
+        <p:spPr>
+          <a:xfrm>
+            <a:off x="685800" y="1828800"/>
+            <a:ext cx="1645920" cy="365760"/>
+          </a:xfrm>
+          <a:prstGeom prst="rect">
+            <a:avLst/>
+          </a:prstGeom>
+          <a:noFill/>
+          <a:ln/>
+        </p:spPr>
+        <p:txBody>
+          <a:bodyPr wrap="square" rtlCol="0" anchor="ctr"/>
+          <a:lstStyle/>
+          <a:p>
+            <a:pPr algn="ctr" indent="0" marL="0">
+              <a:buNone/>
+            </a:pPr>
+            <a:r>
+              <a:rPr lang="en-US" sz="1300" b="1" dirty="0">
+                <a:solidFill>
+                  <a:srgbClr val="0891B2"/>
+                </a:solidFill>
+                <a:latin typeface="Calibri" pitchFamily="34" charset="0"/>
+                <a:ea typeface="Calibri" pitchFamily="34" charset="-122"/>
+                <a:cs typeface="Calibri" pitchFamily="34" charset="-120"/>
+              </a:rPr>
+              <a:t>Notation impérative</a:t>
+            </a:r>
+            <a:endParaRPr lang="en-US" sz="1300" dirty="0"/>
+          </a:p>
+        </p:txBody>
+      </p:sp>
+      <p:sp>
+        <p:nvSpPr>
+          <p:cNvPr id="6" name="Text 4"/>
+          <p:cNvSpPr/>
+          <p:nvPr/>
+        </p:nvSpPr>
+        <p:spPr>
+          <a:xfrm>
+            <a:off x="685800" y="2286000"/>
+            <a:ext cx="1645920" cy="1828800"/>
+          </a:xfrm>
+          <a:prstGeom prst="rect">
+            <a:avLst/>
+          </a:prstGeom>
+          <a:noFill/>
+          <a:ln/>
+        </p:spPr>
+        <p:txBody>
+          <a:bodyPr wrap="square" rtlCol="0" anchor="t"/>
+          <a:lstStyle/>
+          <a:p>
+            <a:pPr algn="ctr" indent="0" marL="0">
+              <a:buNone/>
+            </a:pPr>
+            <a:r>
+              <a:rPr lang="en-US" sz="1100" dirty="0">
+                <a:solidFill>
+                  <a:srgbClr val="94A3B8"/>
+                </a:solidFill>
+                <a:latin typeface="Calibri" pitchFamily="34" charset="0"/>
+                <a:ea typeface="Calibri" pitchFamily="34" charset="-122"/>
+                <a:cs typeface="Calibri" pitchFamily="34" charset="-120"/>
+              </a:rPr>
+              <a:t>OPERATION, PRE, POST — le contrat formel</a:t>
+            </a:r>
+            <a:endParaRPr lang="en-US" sz="1100" dirty="0"/>
+          </a:p>
+        </p:txBody>
+      </p:sp>
+      <p:sp>
+        <p:nvSpPr>
+          <p:cNvPr id="7" name="Shape 5"/>
+          <p:cNvSpPr/>
+          <p:nvPr/>
+        </p:nvSpPr>
+        <p:spPr>
+          <a:xfrm>
+            <a:off x="2651760" y="1097280"/>
+            <a:ext cx="1920240" cy="3200400"/>
+          </a:xfrm>
+          <a:prstGeom prst="roundRect">
+            <a:avLst>
+              <a:gd name="adj" fmla="val 4762"/>
+            </a:avLst>
+          </a:prstGeom>
+          <a:solidFill>
+            <a:srgbClr val="133740"/>
+          </a:solidFill>
+          <a:ln/>
+        </p:spPr>
+      </p:sp>
+      <p:sp>
+        <p:nvSpPr>
+          <p:cNvPr id="8" name="Text 6"/>
+          <p:cNvSpPr/>
+          <p:nvPr/>
+        </p:nvSpPr>
+        <p:spPr>
+          <a:xfrm>
+            <a:off x="2651760" y="1280160"/>
+            <a:ext cx="1920240" cy="457200"/>
+          </a:xfrm>
+          <a:prstGeom prst="rect">
+            <a:avLst/>
+          </a:prstGeom>
+          <a:noFill/>
+          <a:ln/>
+        </p:spPr>
+        <p:txBody>
+          <a:bodyPr wrap="square" rtlCol="0" anchor="ctr"/>
+          <a:lstStyle/>
+          <a:p>
+            <a:pPr algn="ctr" indent="0" marL="0">
+              <a:buNone/>
+            </a:pPr>
+            <a:r>
+              <a:rPr lang="en-US" sz="2800" dirty="0">
+                <a:solidFill>
+                  <a:srgbClr val="000000"/>
+                </a:solidFill>
+              </a:rPr>
+              <a:t>📐</a:t>
+            </a:r>
+            <a:endParaRPr lang="en-US" sz="2800" dirty="0"/>
+          </a:p>
+        </p:txBody>
+      </p:sp>
+      <p:sp>
+        <p:nvSpPr>
+          <p:cNvPr id="9" name="Text 7"/>
+          <p:cNvSpPr/>
+          <p:nvPr/>
+        </p:nvSpPr>
+        <p:spPr>
+          <a:xfrm>
+            <a:off x="2788920" y="1828800"/>
+            <a:ext cx="1645920" cy="365760"/>
+          </a:xfrm>
+          <a:prstGeom prst="rect">
+            <a:avLst/>
+          </a:prstGeom>
+          <a:noFill/>
+          <a:ln/>
+        </p:spPr>
+        <p:txBody>
+          <a:bodyPr wrap="square" rtlCol="0" anchor="ctr"/>
+          <a:lstStyle/>
+          <a:p>
+            <a:pPr algn="ctr" indent="0" marL="0">
+              <a:buNone/>
+            </a:pPr>
+            <a:r>
+              <a:rPr lang="en-US" sz="1300" b="1" dirty="0">
+                <a:solidFill>
+                  <a:srgbClr val="0891B2"/>
+                </a:solidFill>
+                <a:latin typeface="Calibri" pitchFamily="34" charset="0"/>
+                <a:ea typeface="Calibri" pitchFamily="34" charset="-122"/>
+                <a:cs typeface="Calibri" pitchFamily="34" charset="-120"/>
+              </a:rPr>
+              <a:t>VDM</a:t>
+            </a:r>
+            <a:endParaRPr lang="en-US" sz="1300" dirty="0"/>
+          </a:p>
+        </p:txBody>
+      </p:sp>
+      <p:sp>
+        <p:nvSpPr>
+          <p:cNvPr id="10" name="Text 8"/>
+          <p:cNvSpPr/>
+          <p:nvPr/>
+        </p:nvSpPr>
+        <p:spPr>
+          <a:xfrm>
+            <a:off x="2788920" y="2286000"/>
+            <a:ext cx="1645920" cy="1828800"/>
+          </a:xfrm>
+          <a:prstGeom prst="rect">
+            <a:avLst/>
+          </a:prstGeom>
+          <a:noFill/>
+          <a:ln/>
+        </p:spPr>
+        <p:txBody>
+          <a:bodyPr wrap="square" rtlCol="0" anchor="t"/>
+          <a:lstStyle/>
+          <a:p>
+            <a:pPr algn="ctr" indent="0" marL="0">
+              <a:buNone/>
+            </a:pPr>
+            <a:r>
+              <a:rPr lang="en-US" sz="1100" dirty="0">
+                <a:solidFill>
+                  <a:srgbClr val="94A3B8"/>
+                </a:solidFill>
+                <a:latin typeface="Calibri" pitchFamily="34" charset="0"/>
+                <a:ea typeface="Calibri" pitchFamily="34" charset="-122"/>
+                <a:cs typeface="Calibri" pitchFamily="34" charset="-120"/>
+              </a:rPr>
+              <a:t>Logique mathématique avec ≜, pré/post/invariants</a:t>
+            </a:r>
+            <a:endParaRPr lang="en-US" sz="1100" dirty="0"/>
+          </a:p>
+        </p:txBody>
+      </p:sp>
+      <p:sp>
+        <p:nvSpPr>
+          <p:cNvPr id="11" name="Shape 9"/>
+          <p:cNvSpPr/>
+          <p:nvPr/>
+        </p:nvSpPr>
+        <p:spPr>
+          <a:xfrm>
+            <a:off x="4754880" y="1097280"/>
+            <a:ext cx="1920240" cy="3200400"/>
+          </a:xfrm>
+          <a:prstGeom prst="roundRect">
+            <a:avLst>
+              <a:gd name="adj" fmla="val 4762"/>
+            </a:avLst>
+          </a:prstGeom>
+          <a:solidFill>
+            <a:srgbClr val="133740"/>
+          </a:solidFill>
+          <a:ln/>
+        </p:spPr>
+      </p:sp>
+      <p:sp>
+        <p:nvSpPr>
+          <p:cNvPr id="12" name="Text 10"/>
+          <p:cNvSpPr/>
+          <p:nvPr/>
+        </p:nvSpPr>
+        <p:spPr>
+          <a:xfrm>
+            <a:off x="4754880" y="1280160"/>
+            <a:ext cx="1920240" cy="457200"/>
+          </a:xfrm>
+          <a:prstGeom prst="rect">
+            <a:avLst/>
+          </a:prstGeom>
+          <a:noFill/>
+          <a:ln/>
+        </p:spPr>
+        <p:txBody>
+          <a:bodyPr wrap="square" rtlCol="0" anchor="ctr"/>
+          <a:lstStyle/>
+          <a:p>
+            <a:pPr algn="ctr" indent="0" marL="0">
+              <a:buNone/>
+            </a:pPr>
+            <a:r>
+              <a:rPr lang="en-US" sz="2800" dirty="0">
+                <a:solidFill>
+                  <a:srgbClr val="000000"/>
+                </a:solidFill>
+              </a:rPr>
+              <a:t>📊</a:t>
+            </a:r>
+            <a:endParaRPr lang="en-US" sz="2800" dirty="0"/>
+          </a:p>
+        </p:txBody>
+      </p:sp>
+      <p:sp>
+        <p:nvSpPr>
+          <p:cNvPr id="13" name="Text 11"/>
+          <p:cNvSpPr/>
+          <p:nvPr/>
+        </p:nvSpPr>
+        <p:spPr>
+          <a:xfrm>
+            <a:off x="4892040" y="1828800"/>
+            <a:ext cx="1645920" cy="365760"/>
+          </a:xfrm>
+          <a:prstGeom prst="rect">
+            <a:avLst/>
+          </a:prstGeom>
+          <a:noFill/>
+          <a:ln/>
+        </p:spPr>
+        <p:txBody>
+          <a:bodyPr wrap="square" rtlCol="0" anchor="ctr"/>
+          <a:lstStyle/>
+          <a:p>
+            <a:pPr algn="ctr" indent="0" marL="0">
+              <a:buNone/>
+            </a:pPr>
+            <a:r>
+              <a:rPr lang="en-US" sz="1300" b="1" dirty="0">
+                <a:solidFill>
+                  <a:srgbClr val="0891B2"/>
+                </a:solidFill>
+                <a:latin typeface="Calibri" pitchFamily="34" charset="0"/>
+                <a:ea typeface="Calibri" pitchFamily="34" charset="-122"/>
+                <a:cs typeface="Calibri" pitchFamily="34" charset="-120"/>
+              </a:rPr>
+              <a:t>SDL</a:t>
+            </a:r>
+            <a:endParaRPr lang="en-US" sz="1300" dirty="0"/>
+          </a:p>
+        </p:txBody>
+      </p:sp>
+      <p:sp>
+        <p:nvSpPr>
+          <p:cNvPr id="14" name="Text 12"/>
+          <p:cNvSpPr/>
+          <p:nvPr/>
+        </p:nvSpPr>
+        <p:spPr>
+          <a:xfrm>
+            <a:off x="4892040" y="2286000"/>
+            <a:ext cx="1645920" cy="1828800"/>
+          </a:xfrm>
+          <a:prstGeom prst="rect">
+            <a:avLst/>
+          </a:prstGeom>
+          <a:noFill/>
+          <a:ln/>
+        </p:spPr>
+        <p:txBody>
+          <a:bodyPr wrap="square" rtlCol="0" anchor="t"/>
+          <a:lstStyle/>
+          <a:p>
+            <a:pPr algn="ctr" indent="0" marL="0">
+              <a:buNone/>
+            </a:pPr>
+            <a:r>
+              <a:rPr lang="en-US" sz="1100" dirty="0">
+                <a:solidFill>
+                  <a:srgbClr val="94A3B8"/>
+                </a:solidFill>
+                <a:latin typeface="Calibri" pitchFamily="34" charset="0"/>
+                <a:ea typeface="Calibri" pitchFamily="34" charset="-122"/>
+                <a:cs typeface="Calibri" pitchFamily="34" charset="-120"/>
+              </a:rPr>
+              <a:t>Diagrammes graphiques états + transitions</a:t>
+            </a:r>
+            <a:endParaRPr lang="en-US" sz="1100" dirty="0"/>
+          </a:p>
+        </p:txBody>
+      </p:sp>
+      <p:sp>
+        <p:nvSpPr>
+          <p:cNvPr id="15" name="Shape 13"/>
+          <p:cNvSpPr/>
+          <p:nvPr/>
+        </p:nvSpPr>
+        <p:spPr>
+          <a:xfrm>
+            <a:off x="6858000" y="1097280"/>
+            <a:ext cx="1920240" cy="3200400"/>
+          </a:xfrm>
+          <a:prstGeom prst="roundRect">
+            <a:avLst>
+              <a:gd name="adj" fmla="val 4762"/>
+            </a:avLst>
+          </a:prstGeom>
+          <a:solidFill>
+            <a:srgbClr val="133740"/>
+          </a:solidFill>
+          <a:ln/>
+        </p:spPr>
+      </p:sp>
+      <p:sp>
+        <p:nvSpPr>
+          <p:cNvPr id="16" name="Text 14"/>
+          <p:cNvSpPr/>
+          <p:nvPr/>
+        </p:nvSpPr>
+        <p:spPr>
+          <a:xfrm>
+            <a:off x="6858000" y="1280160"/>
+            <a:ext cx="1920240" cy="457200"/>
+          </a:xfrm>
+          <a:prstGeom prst="rect">
+            <a:avLst/>
+          </a:prstGeom>
+          <a:noFill/>
+          <a:ln/>
+        </p:spPr>
+        <p:txBody>
+          <a:bodyPr wrap="square" rtlCol="0" anchor="ctr"/>
+          <a:lstStyle/>
+          <a:p>
+            <a:pPr algn="ctr" indent="0" marL="0">
+              <a:buNone/>
+            </a:pPr>
+            <a:r>
+              <a:rPr lang="en-US" sz="2800" dirty="0">
+                <a:solidFill>
+                  <a:srgbClr val="000000"/>
+                </a:solidFill>
+              </a:rPr>
+              <a:t>🔤</a:t>
+            </a:r>
+            <a:endParaRPr lang="en-US" sz="2800" dirty="0"/>
+          </a:p>
+        </p:txBody>
+      </p:sp>
+      <p:sp>
+        <p:nvSpPr>
+          <p:cNvPr id="17" name="Text 15"/>
+          <p:cNvSpPr/>
+          <p:nvPr/>
+        </p:nvSpPr>
+        <p:spPr>
+          <a:xfrm>
+            <a:off x="6995160" y="1828800"/>
+            <a:ext cx="1645920" cy="365760"/>
+          </a:xfrm>
+          <a:prstGeom prst="rect">
+            <a:avLst/>
+          </a:prstGeom>
+          <a:noFill/>
+          <a:ln/>
+        </p:spPr>
+        <p:txBody>
+          <a:bodyPr wrap="square" rtlCol="0" anchor="ctr"/>
+          <a:lstStyle/>
+          <a:p>
+            <a:pPr algn="ctr" indent="0" marL="0">
+              <a:buNone/>
+            </a:pPr>
+            <a:r>
+              <a:rPr lang="en-US" sz="1300" b="1" dirty="0">
+                <a:solidFill>
+                  <a:srgbClr val="0891B2"/>
+                </a:solidFill>
+                <a:latin typeface="Calibri" pitchFamily="34" charset="0"/>
+                <a:ea typeface="Calibri" pitchFamily="34" charset="-122"/>
+                <a:cs typeface="Calibri" pitchFamily="34" charset="-120"/>
+              </a:rPr>
+              <a:t>ASN.1</a:t>
+            </a:r>
+            <a:endParaRPr lang="en-US" sz="1300" dirty="0"/>
+          </a:p>
+        </p:txBody>
+      </p:sp>
+      <p:sp>
+        <p:nvSpPr>
+          <p:cNvPr id="18" name="Text 16"/>
+          <p:cNvSpPr/>
+          <p:nvPr/>
+        </p:nvSpPr>
+        <p:spPr>
+          <a:xfrm>
+            <a:off x="6995160" y="2286000"/>
+            <a:ext cx="1645920" cy="1828800"/>
+          </a:xfrm>
+          <a:prstGeom prst="rect">
+            <a:avLst/>
+          </a:prstGeom>
+          <a:noFill/>
+          <a:ln/>
+        </p:spPr>
+        <p:txBody>
+          <a:bodyPr wrap="square" rtlCol="0" anchor="t"/>
+          <a:lstStyle/>
+          <a:p>
+            <a:pPr algn="ctr" indent="0" marL="0">
+              <a:buNone/>
+            </a:pPr>
+            <a:r>
+              <a:rPr lang="en-US" sz="1100" dirty="0">
+                <a:solidFill>
+                  <a:srgbClr val="94A3B8"/>
+                </a:solidFill>
+                <a:latin typeface="Calibri" pitchFamily="34" charset="0"/>
+                <a:ea typeface="Calibri" pitchFamily="34" charset="-122"/>
+                <a:cs typeface="Calibri" pitchFamily="34" charset="-120"/>
+              </a:rPr>
+              <a:t>Notation de structure de données inter-systèmes</a:t>
+            </a:r>
+            <a:endParaRPr lang="en-US" sz="1100" dirty="0"/>
           </a:p>
         </p:txBody>
       </p:sp>
